--- a/DR/защита.pptx
+++ b/DR/защита.pptx
@@ -2,7 +2,7 @@
 <file path=ppt/presentation.xml><?xml version="1.0" encoding="utf-8"?>
 <p:presentation xmlns:a="http://schemas.openxmlformats.org/drawingml/2006/main" xmlns:r="http://schemas.openxmlformats.org/officeDocument/2006/relationships" xmlns:p="http://schemas.openxmlformats.org/presentationml/2006/main" saveSubsetFonts="1">
   <p:sldMasterIdLst>
-    <p:sldMasterId id="2147483648" r:id="rId1"/>
+    <p:sldMasterId id="2147483672" r:id="rId1"/>
   </p:sldMasterIdLst>
   <p:notesMasterIdLst>
     <p:notesMasterId r:id="rId12"/>
@@ -206,7 +206,7 @@
           <a:p>
             <a:fld id="{E39E4611-7BA2-4738-94C6-98FE40ED41FA}" type="datetimeFigureOut">
               <a:rPr lang="bg-BG" smtClean="0"/>
-              <a:t>27.4.2026 г.</a:t>
+              <a:t>30.4.2026 г.</a:t>
             </a:fld>
             <a:endParaRPr lang="bg-BG"/>
           </a:p>
@@ -519,21 +519,28 @@
           <a:lstStyle/>
           <a:p>
             <a:r>
+              <a:rPr lang="en-US" dirty="0" smtClean="0"/>
+              <a:t>:</a:t>
+            </a:r>
+            <a:r>
               <a:rPr lang="ru-RU" dirty="0" smtClean="0"/>
-              <a:t>Уважаема г-жо Директор,</a:t>
-            </a:r>
-          </a:p>
-          <a:p>
+              <a:t>Уважаема </a:t>
+            </a:r>
             <a:r>
               <a:rPr lang="ru-RU" dirty="0" smtClean="0"/>
-              <a:t>Уважаема комисия,</a:t>
+              <a:t>г-жо Директор,</a:t>
             </a:r>
           </a:p>
           <a:p>
             <a:r>
               <a:rPr lang="ru-RU" dirty="0" smtClean="0"/>
-              <a:t>Уважаеми гости,</a:t>
-            </a:r>
+              <a:t>Уважаема комисия</a:t>
+            </a:r>
+            <a:r>
+              <a:rPr lang="ru-RU" dirty="0" smtClean="0"/>
+              <a:t>,</a:t>
+            </a:r>
+            <a:endParaRPr lang="ru-RU" dirty="0" smtClean="0"/>
           </a:p>
           <a:p>
             <a:r>
@@ -1401,7 +1408,7 @@
 </file>
 
 <file path=ppt/slideLayouts/slideLayout1.xml><?xml version="1.0" encoding="utf-8"?>
-<p:sldLayout xmlns:a="http://schemas.openxmlformats.org/drawingml/2006/main" xmlns:r="http://schemas.openxmlformats.org/officeDocument/2006/relationships" xmlns:p="http://schemas.openxmlformats.org/presentationml/2006/main" type="title" preserve="1">
+<p:sldLayout xmlns:a="http://schemas.openxmlformats.org/drawingml/2006/main" xmlns:r="http://schemas.openxmlformats.org/officeDocument/2006/relationships" xmlns:p="http://schemas.openxmlformats.org/presentationml/2006/main" showMasterSp="0" type="title" preserve="1">
   <p:cSld name="Title Slide">
     <p:spTree>
       <p:nvGrpSpPr>
@@ -1419,25 +1426,68 @@
       </p:grpSpPr>
       <p:sp>
         <p:nvSpPr>
-          <p:cNvPr id="2" name="Title 1"/>
-          <p:cNvSpPr>
-            <a:spLocks noGrp="1"/>
-          </p:cNvSpPr>
-          <p:nvPr>
-            <p:ph type="ctrTitle"/>
-          </p:nvPr>
+          <p:cNvPr id="7" name="Rectangle 6"/>
+          <p:cNvSpPr/>
+          <p:nvPr/>
         </p:nvSpPr>
         <p:spPr>
           <a:xfrm>
-            <a:off x="1524000" y="1122363"/>
-            <a:ext cx="9144000" cy="2387600"/>
+            <a:off x="-6843" y="2059012"/>
+            <a:ext cx="12195668" cy="1828800"/>
+          </a:xfrm>
+          <a:prstGeom prst="rect">
+            <a:avLst/>
+          </a:prstGeom>
+          <a:solidFill>
+            <a:schemeClr val="tx1"/>
+          </a:solidFill>
+          <a:ln>
+            <a:noFill/>
+          </a:ln>
+        </p:spPr>
+        <p:style>
+          <a:lnRef idx="2">
+            <a:schemeClr val="accent1">
+              <a:shade val="50000"/>
+            </a:schemeClr>
+          </a:lnRef>
+          <a:fillRef idx="1">
+            <a:schemeClr val="accent1"/>
+          </a:fillRef>
+          <a:effectRef idx="0">
+            <a:schemeClr val="accent1"/>
+          </a:effectRef>
+          <a:fontRef idx="minor">
+            <a:schemeClr val="lt1"/>
+          </a:fontRef>
+        </p:style>
+      </p:sp>
+      <p:sp>
+        <p:nvSpPr>
+          <p:cNvPr id="2" name="Title 1"/>
+          <p:cNvSpPr>
+            <a:spLocks noGrp="1"/>
+          </p:cNvSpPr>
+          <p:nvPr>
+            <p:ph type="ctrTitle"/>
+          </p:nvPr>
+        </p:nvSpPr>
+        <p:spPr>
+          <a:xfrm>
+            <a:off x="365759" y="2166364"/>
+            <a:ext cx="11471565" cy="1739347"/>
           </a:xfrm>
         </p:spPr>
         <p:txBody>
-          <a:bodyPr anchor="b"/>
+          <a:bodyPr tIns="45720" bIns="45720" anchor="ctr">
+            <a:normAutofit/>
+          </a:bodyPr>
           <a:lstStyle>
             <a:lvl1pPr algn="ctr">
-              <a:defRPr sz="6000"/>
+              <a:lnSpc>
+                <a:spcPct val="80000"/>
+              </a:lnSpc>
+              <a:defRPr sz="6000" spc="150" baseline="0"/>
             </a:lvl1pPr>
           </a:lstStyle>
           <a:p>
@@ -1445,7 +1495,7 @@
               <a:rPr lang="en-US" smtClean="0"/>
               <a:t>Click to edit Master title style</a:t>
             </a:r>
-            <a:endParaRPr lang="bg-BG"/>
+            <a:endParaRPr lang="en-US" dirty="0"/>
           </a:p>
         </p:txBody>
       </p:sp>
@@ -1461,16 +1511,18 @@
         </p:nvSpPr>
         <p:spPr>
           <a:xfrm>
-            <a:off x="1524000" y="3602038"/>
-            <a:ext cx="9144000" cy="1655762"/>
+            <a:off x="1524000" y="3996250"/>
+            <a:ext cx="9144000" cy="1309255"/>
           </a:xfrm>
         </p:spPr>
         <p:txBody>
-          <a:bodyPr/>
+          <a:bodyPr>
+            <a:normAutofit/>
+          </a:bodyPr>
           <a:lstStyle>
             <a:lvl1pPr marL="0" indent="0" algn="ctr">
               <a:buNone/>
-              <a:defRPr sz="2400"/>
+              <a:defRPr sz="2000"/>
             </a:lvl1pPr>
             <a:lvl2pPr marL="457200" indent="0" algn="ctr">
               <a:buNone/>
@@ -1478,31 +1530,31 @@
             </a:lvl2pPr>
             <a:lvl3pPr marL="914400" indent="0" algn="ctr">
               <a:buNone/>
-              <a:defRPr sz="1800"/>
+              <a:defRPr sz="2000"/>
             </a:lvl3pPr>
             <a:lvl4pPr marL="1371600" indent="0" algn="ctr">
               <a:buNone/>
-              <a:defRPr sz="1600"/>
+              <a:defRPr sz="2000"/>
             </a:lvl4pPr>
             <a:lvl5pPr marL="1828800" indent="0" algn="ctr">
               <a:buNone/>
-              <a:defRPr sz="1600"/>
+              <a:defRPr sz="2000"/>
             </a:lvl5pPr>
             <a:lvl6pPr marL="2286000" indent="0" algn="ctr">
               <a:buNone/>
-              <a:defRPr sz="1600"/>
+              <a:defRPr sz="2000"/>
             </a:lvl6pPr>
             <a:lvl7pPr marL="2743200" indent="0" algn="ctr">
               <a:buNone/>
-              <a:defRPr sz="1600"/>
+              <a:defRPr sz="2000"/>
             </a:lvl7pPr>
             <a:lvl8pPr marL="3200400" indent="0" algn="ctr">
               <a:buNone/>
-              <a:defRPr sz="1600"/>
+              <a:defRPr sz="2000"/>
             </a:lvl8pPr>
             <a:lvl9pPr marL="3657600" indent="0" algn="ctr">
               <a:buNone/>
-              <a:defRPr sz="1600"/>
+              <a:defRPr sz="2000"/>
             </a:lvl9pPr>
           </a:lstStyle>
           <a:p>
@@ -1510,7 +1562,7 @@
               <a:rPr lang="en-US" smtClean="0"/>
               <a:t>Click to edit Master subtitle style</a:t>
             </a:r>
-            <a:endParaRPr lang="bg-BG"/>
+            <a:endParaRPr lang="en-US" dirty="0"/>
           </a:p>
         </p:txBody>
       </p:sp>
@@ -1531,7 +1583,7 @@
           <a:p>
             <a:fld id="{1FCAA85D-A80E-45D6-AD8D-1520FADD59BE}" type="datetimeFigureOut">
               <a:rPr lang="bg-BG" smtClean="0"/>
-              <a:t>27.4.2026 г.</a:t>
+              <a:t>30.4.2026 г.</a:t>
             </a:fld>
             <a:endParaRPr lang="bg-BG"/>
           </a:p>
@@ -1582,7 +1634,7 @@
     </p:spTree>
     <p:extLst>
       <p:ext uri="{BB962C8B-B14F-4D97-AF65-F5344CB8AC3E}">
-        <p14:creationId xmlns:p14="http://schemas.microsoft.com/office/powerpoint/2010/main" val="2479182690"/>
+        <p14:creationId xmlns:p14="http://schemas.microsoft.com/office/powerpoint/2010/main" val="3588908891"/>
       </p:ext>
     </p:extLst>
   </p:cSld>
@@ -1628,7 +1680,7 @@
               <a:rPr lang="en-US" smtClean="0"/>
               <a:t>Click to edit Master title style</a:t>
             </a:r>
-            <a:endParaRPr lang="bg-BG"/>
+            <a:endParaRPr lang="en-US" dirty="0"/>
           </a:p>
         </p:txBody>
       </p:sp>
@@ -1680,7 +1732,7 @@
               <a:rPr lang="en-US" smtClean="0"/>
               <a:t>Fifth level</a:t>
             </a:r>
-            <a:endParaRPr lang="bg-BG"/>
+            <a:endParaRPr lang="en-US" dirty="0"/>
           </a:p>
         </p:txBody>
       </p:sp>
@@ -1701,7 +1753,7 @@
           <a:p>
             <a:fld id="{1FCAA85D-A80E-45D6-AD8D-1520FADD59BE}" type="datetimeFigureOut">
               <a:rPr lang="bg-BG" smtClean="0"/>
-              <a:t>27.4.2026 г.</a:t>
+              <a:t>30.4.2026 г.</a:t>
             </a:fld>
             <a:endParaRPr lang="bg-BG"/>
           </a:p>
@@ -1752,7 +1804,7 @@
     </p:spTree>
     <p:extLst>
       <p:ext uri="{BB962C8B-B14F-4D97-AF65-F5344CB8AC3E}">
-        <p14:creationId xmlns:p14="http://schemas.microsoft.com/office/powerpoint/2010/main" val="4252719635"/>
+        <p14:creationId xmlns:p14="http://schemas.microsoft.com/office/powerpoint/2010/main" val="3595896598"/>
       </p:ext>
     </p:extLst>
   </p:cSld>
@@ -1763,7 +1815,7 @@
 </file>
 
 <file path=ppt/slideLayouts/slideLayout11.xml><?xml version="1.0" encoding="utf-8"?>
-<p:sldLayout xmlns:a="http://schemas.openxmlformats.org/drawingml/2006/main" xmlns:r="http://schemas.openxmlformats.org/officeDocument/2006/relationships" xmlns:p="http://schemas.openxmlformats.org/presentationml/2006/main" type="vertTitleAndTx" preserve="1">
+<p:sldLayout xmlns:a="http://schemas.openxmlformats.org/drawingml/2006/main" xmlns:r="http://schemas.openxmlformats.org/officeDocument/2006/relationships" xmlns:p="http://schemas.openxmlformats.org/presentationml/2006/main" showMasterSp="0" type="vertTitleAndTx" preserve="1">
   <p:cSld name="Vertical Title and Text">
     <p:spTree>
       <p:nvGrpSpPr>
@@ -1781,18 +1833,56 @@
       </p:grpSpPr>
       <p:sp>
         <p:nvSpPr>
-          <p:cNvPr id="2" name="Vertical Title 1"/>
-          <p:cNvSpPr>
-            <a:spLocks noGrp="1"/>
-          </p:cNvSpPr>
-          <p:nvPr>
-            <p:ph type="title" orient="vert"/>
-          </p:nvPr>
+          <p:cNvPr id="7" name="Rectangle 6"/>
+          <p:cNvSpPr/>
+          <p:nvPr/>
         </p:nvSpPr>
         <p:spPr>
           <a:xfrm>
-            <a:off x="8724900" y="365125"/>
-            <a:ext cx="2628900" cy="5811838"/>
+            <a:off x="9019312" y="0"/>
+            <a:ext cx="2743200" cy="6858000"/>
+          </a:xfrm>
+          <a:prstGeom prst="rect">
+            <a:avLst/>
+          </a:prstGeom>
+          <a:solidFill>
+            <a:schemeClr val="tx1"/>
+          </a:solidFill>
+          <a:ln>
+            <a:noFill/>
+          </a:ln>
+        </p:spPr>
+        <p:style>
+          <a:lnRef idx="2">
+            <a:schemeClr val="accent1">
+              <a:shade val="50000"/>
+            </a:schemeClr>
+          </a:lnRef>
+          <a:fillRef idx="1">
+            <a:schemeClr val="accent1"/>
+          </a:fillRef>
+          <a:effectRef idx="0">
+            <a:schemeClr val="accent1"/>
+          </a:effectRef>
+          <a:fontRef idx="minor">
+            <a:schemeClr val="lt1"/>
+          </a:fontRef>
+        </p:style>
+      </p:sp>
+      <p:sp>
+        <p:nvSpPr>
+          <p:cNvPr id="2" name="Vertical Title 1"/>
+          <p:cNvSpPr>
+            <a:spLocks noGrp="1"/>
+          </p:cNvSpPr>
+          <p:nvPr>
+            <p:ph type="title" orient="vert"/>
+          </p:nvPr>
+        </p:nvSpPr>
+        <p:spPr>
+          <a:xfrm>
+            <a:off x="9160624" y="274638"/>
+            <a:ext cx="2402380" cy="5897562"/>
           </a:xfrm>
         </p:spPr>
         <p:txBody>
@@ -1803,7 +1893,7 @@
               <a:rPr lang="en-US" smtClean="0"/>
               <a:t>Click to edit Master title style</a:t>
             </a:r>
-            <a:endParaRPr lang="bg-BG"/>
+            <a:endParaRPr lang="en-US" dirty="0"/>
           </a:p>
         </p:txBody>
       </p:sp>
@@ -1819,8 +1909,8 @@
         </p:nvSpPr>
         <p:spPr>
           <a:xfrm>
-            <a:off x="838200" y="365125"/>
-            <a:ext cx="7734300" cy="5811838"/>
+            <a:off x="838199" y="274638"/>
+            <a:ext cx="7973291" cy="5897562"/>
           </a:xfrm>
         </p:spPr>
         <p:txBody>
@@ -1860,7 +1950,7 @@
               <a:rPr lang="en-US" smtClean="0"/>
               <a:t>Fifth level</a:t>
             </a:r>
-            <a:endParaRPr lang="bg-BG"/>
+            <a:endParaRPr lang="en-US" dirty="0"/>
           </a:p>
         </p:txBody>
       </p:sp>
@@ -1874,14 +1964,19 @@
             <p:ph type="dt" sz="half" idx="10"/>
           </p:nvPr>
         </p:nvSpPr>
-        <p:spPr/>
+        <p:spPr>
+          <a:xfrm>
+            <a:off x="838200" y="6422854"/>
+            <a:ext cx="2743196" cy="365125"/>
+          </a:xfrm>
+        </p:spPr>
         <p:txBody>
           <a:bodyPr/>
           <a:lstStyle/>
           <a:p>
             <a:fld id="{1FCAA85D-A80E-45D6-AD8D-1520FADD59BE}" type="datetimeFigureOut">
               <a:rPr lang="bg-BG" smtClean="0"/>
-              <a:t>27.4.2026 г.</a:t>
+              <a:t>30.4.2026 г.</a:t>
             </a:fld>
             <a:endParaRPr lang="bg-BG"/>
           </a:p>
@@ -1897,7 +1992,12 @@
             <p:ph type="ftr" sz="quarter" idx="11"/>
           </p:nvPr>
         </p:nvSpPr>
-        <p:spPr/>
+        <p:spPr>
+          <a:xfrm>
+            <a:off x="3776135" y="6422854"/>
+            <a:ext cx="4279669" cy="365125"/>
+          </a:xfrm>
+        </p:spPr>
         <p:txBody>
           <a:bodyPr/>
           <a:lstStyle/>
@@ -1916,7 +2016,12 @@
             <p:ph type="sldNum" sz="quarter" idx="12"/>
           </p:nvPr>
         </p:nvSpPr>
-        <p:spPr/>
+        <p:spPr>
+          <a:xfrm>
+            <a:off x="8073048" y="6422854"/>
+            <a:ext cx="879759" cy="365125"/>
+          </a:xfrm>
+        </p:spPr>
         <p:txBody>
           <a:bodyPr/>
           <a:lstStyle/>
@@ -1932,7 +2037,7 @@
     </p:spTree>
     <p:extLst>
       <p:ext uri="{BB962C8B-B14F-4D97-AF65-F5344CB8AC3E}">
-        <p14:creationId xmlns:p14="http://schemas.microsoft.com/office/powerpoint/2010/main" val="2935947820"/>
+        <p14:creationId xmlns:p14="http://schemas.microsoft.com/office/powerpoint/2010/main" val="376767362"/>
       </p:ext>
     </p:extLst>
   </p:cSld>
@@ -1978,7 +2083,7 @@
               <a:rPr lang="en-US" smtClean="0"/>
               <a:t>Click to edit Master title style</a:t>
             </a:r>
-            <a:endParaRPr lang="bg-BG"/>
+            <a:endParaRPr lang="en-US" dirty="0"/>
           </a:p>
         </p:txBody>
       </p:sp>
@@ -2030,7 +2135,7 @@
               <a:rPr lang="en-US" smtClean="0"/>
               <a:t>Fifth level</a:t>
             </a:r>
-            <a:endParaRPr lang="bg-BG"/>
+            <a:endParaRPr lang="en-US" dirty="0"/>
           </a:p>
         </p:txBody>
       </p:sp>
@@ -2051,7 +2156,7 @@
           <a:p>
             <a:fld id="{1FCAA85D-A80E-45D6-AD8D-1520FADD59BE}" type="datetimeFigureOut">
               <a:rPr lang="bg-BG" smtClean="0"/>
-              <a:t>27.4.2026 г.</a:t>
+              <a:t>30.4.2026 г.</a:t>
             </a:fld>
             <a:endParaRPr lang="bg-BG"/>
           </a:p>
@@ -2102,7 +2207,7 @@
     </p:spTree>
     <p:extLst>
       <p:ext uri="{BB962C8B-B14F-4D97-AF65-F5344CB8AC3E}">
-        <p14:creationId xmlns:p14="http://schemas.microsoft.com/office/powerpoint/2010/main" val="501226853"/>
+        <p14:creationId xmlns:p14="http://schemas.microsoft.com/office/powerpoint/2010/main" val="2332823474"/>
       </p:ext>
     </p:extLst>
   </p:cSld>
@@ -2113,8 +2218,13 @@
 </file>
 
 <file path=ppt/slideLayouts/slideLayout3.xml><?xml version="1.0" encoding="utf-8"?>
-<p:sldLayout xmlns:a="http://schemas.openxmlformats.org/drawingml/2006/main" xmlns:r="http://schemas.openxmlformats.org/officeDocument/2006/relationships" xmlns:p="http://schemas.openxmlformats.org/presentationml/2006/main" type="secHead" preserve="1">
+<p:sldLayout xmlns:a="http://schemas.openxmlformats.org/drawingml/2006/main" xmlns:r="http://schemas.openxmlformats.org/officeDocument/2006/relationships" xmlns:p="http://schemas.openxmlformats.org/presentationml/2006/main" showMasterSp="0" type="secHead" preserve="1">
   <p:cSld name="Section Header">
+    <p:bg>
+      <p:bgRef idx="1001">
+        <a:schemeClr val="bg1"/>
+      </p:bgRef>
+    </p:bg>
     <p:spTree>
       <p:nvGrpSpPr>
         <p:cNvPr id="1" name=""/>
@@ -2131,25 +2241,72 @@
       </p:grpSpPr>
       <p:sp>
         <p:nvSpPr>
-          <p:cNvPr id="2" name="Title 1"/>
-          <p:cNvSpPr>
-            <a:spLocks noGrp="1"/>
-          </p:cNvSpPr>
-          <p:nvPr>
-            <p:ph type="title"/>
-          </p:nvPr>
+          <p:cNvPr id="7" name="Rectangle 6"/>
+          <p:cNvSpPr/>
+          <p:nvPr/>
         </p:nvSpPr>
         <p:spPr>
           <a:xfrm>
-            <a:off x="831850" y="1709738"/>
-            <a:ext cx="10515600" cy="2852737"/>
+            <a:off x="-6843" y="2059012"/>
+            <a:ext cx="12195668" cy="1828800"/>
+          </a:xfrm>
+          <a:prstGeom prst="rect">
+            <a:avLst/>
+          </a:prstGeom>
+          <a:solidFill>
+            <a:schemeClr val="tx2"/>
+          </a:solidFill>
+          <a:ln>
+            <a:noFill/>
+          </a:ln>
+        </p:spPr>
+        <p:style>
+          <a:lnRef idx="2">
+            <a:schemeClr val="accent1">
+              <a:shade val="50000"/>
+            </a:schemeClr>
+          </a:lnRef>
+          <a:fillRef idx="1">
+            <a:schemeClr val="accent1"/>
+          </a:fillRef>
+          <a:effectRef idx="0">
+            <a:schemeClr val="accent1"/>
+          </a:effectRef>
+          <a:fontRef idx="minor">
+            <a:schemeClr val="lt1"/>
+          </a:fontRef>
+        </p:style>
+      </p:sp>
+      <p:sp>
+        <p:nvSpPr>
+          <p:cNvPr id="2" name="Title 1"/>
+          <p:cNvSpPr>
+            <a:spLocks noGrp="1"/>
+          </p:cNvSpPr>
+          <p:nvPr>
+            <p:ph type="title"/>
+          </p:nvPr>
+        </p:nvSpPr>
+        <p:spPr>
+          <a:xfrm>
+            <a:off x="833191" y="2208879"/>
+            <a:ext cx="10515600" cy="1676400"/>
           </a:xfrm>
         </p:spPr>
         <p:txBody>
-          <a:bodyPr anchor="b"/>
+          <a:bodyPr anchor="ctr">
+            <a:noAutofit/>
+          </a:bodyPr>
           <a:lstStyle>
-            <a:lvl1pPr>
-              <a:defRPr sz="6000"/>
+            <a:lvl1pPr algn="ctr">
+              <a:lnSpc>
+                <a:spcPct val="80000"/>
+              </a:lnSpc>
+              <a:defRPr sz="6000" b="0" spc="150" baseline="0">
+                <a:solidFill>
+                  <a:schemeClr val="bg1"/>
+                </a:solidFill>
+              </a:defRPr>
             </a:lvl1pPr>
           </a:lstStyle>
           <a:p>
@@ -2157,7 +2314,7 @@
               <a:rPr lang="en-US" smtClean="0"/>
               <a:t>Click to edit Master title style</a:t>
             </a:r>
-            <a:endParaRPr lang="bg-BG"/>
+            <a:endParaRPr lang="en-US" dirty="0"/>
           </a:p>
         </p:txBody>
       </p:sp>
@@ -2173,26 +2330,26 @@
         </p:nvSpPr>
         <p:spPr>
           <a:xfrm>
-            <a:off x="831850" y="4589463"/>
-            <a:ext cx="10515600" cy="1500187"/>
+            <a:off x="833191" y="4010334"/>
+            <a:ext cx="10515600" cy="1174639"/>
           </a:xfrm>
         </p:spPr>
         <p:txBody>
-          <a:bodyPr/>
+          <a:bodyPr anchor="t">
+            <a:normAutofit/>
+          </a:bodyPr>
           <a:lstStyle>
-            <a:lvl1pPr marL="0" indent="0">
-              <a:buNone/>
-              <a:defRPr sz="2400">
+            <a:lvl1pPr marL="0" indent="0" algn="ctr">
+              <a:buNone/>
+              <a:defRPr sz="2000">
                 <a:solidFill>
-                  <a:schemeClr val="tx1">
-                    <a:tint val="75000"/>
-                  </a:schemeClr>
+                  <a:schemeClr val="tx2"/>
                 </a:solidFill>
               </a:defRPr>
             </a:lvl1pPr>
             <a:lvl2pPr marL="457200" indent="0">
               <a:buNone/>
-              <a:defRPr sz="2000">
+              <a:defRPr sz="1800">
                 <a:solidFill>
                   <a:schemeClr val="tx1">
                     <a:tint val="75000"/>
@@ -2202,7 +2359,7 @@
             </a:lvl2pPr>
             <a:lvl3pPr marL="914400" indent="0">
               <a:buNone/>
-              <a:defRPr sz="1800">
+              <a:defRPr sz="1600">
                 <a:solidFill>
                   <a:schemeClr val="tx1">
                     <a:tint val="75000"/>
@@ -2212,7 +2369,7 @@
             </a:lvl3pPr>
             <a:lvl4pPr marL="1371600" indent="0">
               <a:buNone/>
-              <a:defRPr sz="1600">
+              <a:defRPr sz="1400">
                 <a:solidFill>
                   <a:schemeClr val="tx1">
                     <a:tint val="75000"/>
@@ -2222,7 +2379,7 @@
             </a:lvl4pPr>
             <a:lvl5pPr marL="1828800" indent="0">
               <a:buNone/>
-              <a:defRPr sz="1600">
+              <a:defRPr sz="1400">
                 <a:solidFill>
                   <a:schemeClr val="tx1">
                     <a:tint val="75000"/>
@@ -2232,7 +2389,7 @@
             </a:lvl5pPr>
             <a:lvl6pPr marL="2286000" indent="0">
               <a:buNone/>
-              <a:defRPr sz="1600">
+              <a:defRPr sz="1400">
                 <a:solidFill>
                   <a:schemeClr val="tx1">
                     <a:tint val="75000"/>
@@ -2242,7 +2399,7 @@
             </a:lvl6pPr>
             <a:lvl7pPr marL="2743200" indent="0">
               <a:buNone/>
-              <a:defRPr sz="1600">
+              <a:defRPr sz="1400">
                 <a:solidFill>
                   <a:schemeClr val="tx1">
                     <a:tint val="75000"/>
@@ -2252,7 +2409,7 @@
             </a:lvl7pPr>
             <a:lvl8pPr marL="3200400" indent="0">
               <a:buNone/>
-              <a:defRPr sz="1600">
+              <a:defRPr sz="1400">
                 <a:solidFill>
                   <a:schemeClr val="tx1">
                     <a:tint val="75000"/>
@@ -2262,7 +2419,7 @@
             </a:lvl8pPr>
             <a:lvl9pPr marL="3657600" indent="0">
               <a:buNone/>
-              <a:defRPr sz="1600">
+              <a:defRPr sz="1400">
                 <a:solidFill>
                   <a:schemeClr val="tx1">
                     <a:tint val="75000"/>
@@ -2293,11 +2450,19 @@
         <p:spPr/>
         <p:txBody>
           <a:bodyPr/>
-          <a:lstStyle/>
+          <a:lstStyle>
+            <a:lvl1pPr>
+              <a:defRPr>
+                <a:solidFill>
+                  <a:schemeClr val="tx2"/>
+                </a:solidFill>
+              </a:defRPr>
+            </a:lvl1pPr>
+          </a:lstStyle>
           <a:p>
             <a:fld id="{1FCAA85D-A80E-45D6-AD8D-1520FADD59BE}" type="datetimeFigureOut">
               <a:rPr lang="bg-BG" smtClean="0"/>
-              <a:t>27.4.2026 г.</a:t>
+              <a:t>30.4.2026 г.</a:t>
             </a:fld>
             <a:endParaRPr lang="bg-BG"/>
           </a:p>
@@ -2316,7 +2481,15 @@
         <p:spPr/>
         <p:txBody>
           <a:bodyPr/>
-          <a:lstStyle/>
+          <a:lstStyle>
+            <a:lvl1pPr>
+              <a:defRPr>
+                <a:solidFill>
+                  <a:schemeClr val="tx2"/>
+                </a:solidFill>
+              </a:defRPr>
+            </a:lvl1pPr>
+          </a:lstStyle>
           <a:p>
             <a:endParaRPr lang="bg-BG"/>
           </a:p>
@@ -2335,7 +2508,15 @@
         <p:spPr/>
         <p:txBody>
           <a:bodyPr/>
-          <a:lstStyle/>
+          <a:lstStyle>
+            <a:lvl1pPr>
+              <a:defRPr>
+                <a:solidFill>
+                  <a:schemeClr val="tx2"/>
+                </a:solidFill>
+              </a:defRPr>
+            </a:lvl1pPr>
+          </a:lstStyle>
           <a:p>
             <a:fld id="{57004B8A-7D95-4061-8393-5B64690FEDC9}" type="slidenum">
               <a:rPr lang="bg-BG" smtClean="0"/>
@@ -2348,12 +2529,12 @@
     </p:spTree>
     <p:extLst>
       <p:ext uri="{BB962C8B-B14F-4D97-AF65-F5344CB8AC3E}">
-        <p14:creationId xmlns:p14="http://schemas.microsoft.com/office/powerpoint/2010/main" val="1520139766"/>
+        <p14:creationId xmlns:p14="http://schemas.microsoft.com/office/powerpoint/2010/main" val="282478657"/>
       </p:ext>
     </p:extLst>
   </p:cSld>
   <p:clrMapOvr>
-    <a:masterClrMapping/>
+    <a:overrideClrMapping bg1="lt1" tx1="dk1" bg2="lt2" tx2="dk2" accent1="accent1" accent2="accent2" accent3="accent3" accent4="accent4" accent5="accent5" accent6="accent6" hlink="hlink" folHlink="folHlink"/>
   </p:clrMapOvr>
 </p:sldLayout>
 </file>
@@ -2377,7 +2558,7 @@
       </p:grpSpPr>
       <p:sp>
         <p:nvSpPr>
-          <p:cNvPr id="2" name="Title 1"/>
+          <p:cNvPr id="8" name="Title 7"/>
           <p:cNvSpPr>
             <a:spLocks noGrp="1"/>
           </p:cNvSpPr>
@@ -2394,7 +2575,7 @@
               <a:rPr lang="en-US" smtClean="0"/>
               <a:t>Click to edit Master title style</a:t>
             </a:r>
-            <a:endParaRPr lang="bg-BG"/>
+            <a:endParaRPr lang="en-US" dirty="0"/>
           </a:p>
         </p:txBody>
       </p:sp>
@@ -2410,13 +2591,41 @@
         </p:nvSpPr>
         <p:spPr>
           <a:xfrm>
-            <a:off x="838200" y="1825625"/>
-            <a:ext cx="5181600" cy="4351338"/>
+            <a:off x="1205344" y="2011680"/>
+            <a:ext cx="4754880" cy="4206240"/>
           </a:xfrm>
         </p:spPr>
         <p:txBody>
           <a:bodyPr/>
-          <a:lstStyle/>
+          <a:lstStyle>
+            <a:lvl1pPr>
+              <a:defRPr sz="2200"/>
+            </a:lvl1pPr>
+            <a:lvl2pPr>
+              <a:defRPr sz="2000"/>
+            </a:lvl2pPr>
+            <a:lvl3pPr>
+              <a:defRPr sz="1800"/>
+            </a:lvl3pPr>
+            <a:lvl4pPr>
+              <a:defRPr sz="1600"/>
+            </a:lvl4pPr>
+            <a:lvl5pPr>
+              <a:defRPr sz="1600"/>
+            </a:lvl5pPr>
+            <a:lvl6pPr>
+              <a:defRPr sz="1600"/>
+            </a:lvl6pPr>
+            <a:lvl7pPr>
+              <a:defRPr sz="1600"/>
+            </a:lvl7pPr>
+            <a:lvl8pPr>
+              <a:defRPr sz="1600"/>
+            </a:lvl8pPr>
+            <a:lvl9pPr>
+              <a:defRPr sz="1600"/>
+            </a:lvl9pPr>
+          </a:lstStyle>
           <a:p>
             <a:pPr lvl="0"/>
             <a:r>
@@ -2451,7 +2660,7 @@
               <a:rPr lang="en-US" smtClean="0"/>
               <a:t>Fifth level</a:t>
             </a:r>
-            <a:endParaRPr lang="bg-BG"/>
+            <a:endParaRPr lang="en-US" dirty="0"/>
           </a:p>
         </p:txBody>
       </p:sp>
@@ -2467,13 +2676,41 @@
         </p:nvSpPr>
         <p:spPr>
           <a:xfrm>
-            <a:off x="6172200" y="1825625"/>
-            <a:ext cx="5181600" cy="4351338"/>
+            <a:off x="6230391" y="2011680"/>
+            <a:ext cx="4754880" cy="4206240"/>
           </a:xfrm>
         </p:spPr>
         <p:txBody>
           <a:bodyPr/>
-          <a:lstStyle/>
+          <a:lstStyle>
+            <a:lvl1pPr>
+              <a:defRPr sz="2200"/>
+            </a:lvl1pPr>
+            <a:lvl2pPr>
+              <a:defRPr sz="2000"/>
+            </a:lvl2pPr>
+            <a:lvl3pPr>
+              <a:defRPr sz="1800"/>
+            </a:lvl3pPr>
+            <a:lvl4pPr>
+              <a:defRPr sz="1600"/>
+            </a:lvl4pPr>
+            <a:lvl5pPr>
+              <a:defRPr sz="1600"/>
+            </a:lvl5pPr>
+            <a:lvl6pPr>
+              <a:defRPr sz="1600"/>
+            </a:lvl6pPr>
+            <a:lvl7pPr>
+              <a:defRPr sz="1600"/>
+            </a:lvl7pPr>
+            <a:lvl8pPr>
+              <a:defRPr sz="1600"/>
+            </a:lvl8pPr>
+            <a:lvl9pPr>
+              <a:defRPr sz="1600"/>
+            </a:lvl9pPr>
+          </a:lstStyle>
           <a:p>
             <a:pPr lvl="0"/>
             <a:r>
@@ -2508,7 +2745,7 @@
               <a:rPr lang="en-US" smtClean="0"/>
               <a:t>Fifth level</a:t>
             </a:r>
-            <a:endParaRPr lang="bg-BG"/>
+            <a:endParaRPr lang="en-US" dirty="0"/>
           </a:p>
         </p:txBody>
       </p:sp>
@@ -2529,7 +2766,7 @@
           <a:p>
             <a:fld id="{1FCAA85D-A80E-45D6-AD8D-1520FADD59BE}" type="datetimeFigureOut">
               <a:rPr lang="bg-BG" smtClean="0"/>
-              <a:t>27.4.2026 г.</a:t>
+              <a:t>30.4.2026 г.</a:t>
             </a:fld>
             <a:endParaRPr lang="bg-BG"/>
           </a:p>
@@ -2580,7 +2817,7 @@
     </p:spTree>
     <p:extLst>
       <p:ext uri="{BB962C8B-B14F-4D97-AF65-F5344CB8AC3E}">
-        <p14:creationId xmlns:p14="http://schemas.microsoft.com/office/powerpoint/2010/main" val="3769623717"/>
+        <p14:creationId xmlns:p14="http://schemas.microsoft.com/office/powerpoint/2010/main" val="2642057604"/>
       </p:ext>
     </p:extLst>
   </p:cSld>
@@ -2609,54 +2846,51 @@
       </p:grpSpPr>
       <p:sp>
         <p:nvSpPr>
-          <p:cNvPr id="2" name="Title 1"/>
+          <p:cNvPr id="10" name="Title 9"/>
           <p:cNvSpPr>
             <a:spLocks noGrp="1"/>
           </p:cNvSpPr>
           <p:nvPr>
             <p:ph type="title"/>
+          </p:nvPr>
+        </p:nvSpPr>
+        <p:spPr/>
+        <p:txBody>
+          <a:bodyPr/>
+          <a:lstStyle/>
+          <a:p>
+            <a:r>
+              <a:rPr lang="en-US" smtClean="0"/>
+              <a:t>Click to edit Master title style</a:t>
+            </a:r>
+            <a:endParaRPr lang="en-US" dirty="0"/>
+          </a:p>
+        </p:txBody>
+      </p:sp>
+      <p:sp>
+        <p:nvSpPr>
+          <p:cNvPr id="3" name="Text Placeholder 2"/>
+          <p:cNvSpPr>
+            <a:spLocks noGrp="1"/>
+          </p:cNvSpPr>
+          <p:nvPr>
+            <p:ph type="body" idx="1"/>
           </p:nvPr>
         </p:nvSpPr>
         <p:spPr>
           <a:xfrm>
-            <a:off x="839788" y="365125"/>
-            <a:ext cx="10515600" cy="1325563"/>
+            <a:off x="1207008" y="1913470"/>
+            <a:ext cx="4754880" cy="743094"/>
           </a:xfrm>
         </p:spPr>
         <p:txBody>
-          <a:bodyPr/>
-          <a:lstStyle/>
-          <a:p>
-            <a:r>
-              <a:rPr lang="en-US" smtClean="0"/>
-              <a:t>Click to edit Master title style</a:t>
-            </a:r>
-            <a:endParaRPr lang="bg-BG"/>
-          </a:p>
-        </p:txBody>
-      </p:sp>
-      <p:sp>
-        <p:nvSpPr>
-          <p:cNvPr id="3" name="Text Placeholder 2"/>
-          <p:cNvSpPr>
-            <a:spLocks noGrp="1"/>
-          </p:cNvSpPr>
-          <p:nvPr>
-            <p:ph type="body" idx="1"/>
-          </p:nvPr>
-        </p:nvSpPr>
-        <p:spPr>
-          <a:xfrm>
-            <a:off x="839788" y="1681163"/>
-            <a:ext cx="5157787" cy="823912"/>
-          </a:xfrm>
-        </p:spPr>
-        <p:txBody>
-          <a:bodyPr anchor="b"/>
+          <a:bodyPr anchor="ctr">
+            <a:normAutofit/>
+          </a:bodyPr>
           <a:lstStyle>
             <a:lvl1pPr marL="0" indent="0">
               <a:buNone/>
-              <a:defRPr sz="2400" b="1"/>
+              <a:defRPr sz="2100" b="1"/>
             </a:lvl1pPr>
             <a:lvl2pPr marL="457200" indent="0">
               <a:buNone/>
@@ -2712,13 +2946,41 @@
         </p:nvSpPr>
         <p:spPr>
           <a:xfrm>
-            <a:off x="839788" y="2505075"/>
-            <a:ext cx="5157787" cy="3684588"/>
+            <a:off x="1207008" y="2656566"/>
+            <a:ext cx="4754880" cy="3566160"/>
           </a:xfrm>
         </p:spPr>
         <p:txBody>
           <a:bodyPr/>
-          <a:lstStyle/>
+          <a:lstStyle>
+            <a:lvl1pPr>
+              <a:defRPr sz="2200"/>
+            </a:lvl1pPr>
+            <a:lvl2pPr>
+              <a:defRPr sz="2000"/>
+            </a:lvl2pPr>
+            <a:lvl3pPr>
+              <a:defRPr sz="1800"/>
+            </a:lvl3pPr>
+            <a:lvl4pPr>
+              <a:defRPr sz="1600"/>
+            </a:lvl4pPr>
+            <a:lvl5pPr>
+              <a:defRPr sz="1600"/>
+            </a:lvl5pPr>
+            <a:lvl6pPr>
+              <a:defRPr sz="1600"/>
+            </a:lvl6pPr>
+            <a:lvl7pPr>
+              <a:defRPr sz="1600"/>
+            </a:lvl7pPr>
+            <a:lvl8pPr>
+              <a:defRPr sz="1600"/>
+            </a:lvl8pPr>
+            <a:lvl9pPr>
+              <a:defRPr sz="1600"/>
+            </a:lvl9pPr>
+          </a:lstStyle>
           <a:p>
             <a:pPr lvl="0"/>
             <a:r>
@@ -2753,7 +3015,7 @@
               <a:rPr lang="en-US" smtClean="0"/>
               <a:t>Fifth level</a:t>
             </a:r>
-            <a:endParaRPr lang="bg-BG"/>
+            <a:endParaRPr lang="en-US" dirty="0"/>
           </a:p>
         </p:txBody>
       </p:sp>
@@ -2769,16 +3031,18 @@
         </p:nvSpPr>
         <p:spPr>
           <a:xfrm>
-            <a:off x="6172200" y="1681163"/>
-            <a:ext cx="5183188" cy="823912"/>
+            <a:off x="6231230" y="1913470"/>
+            <a:ext cx="4754880" cy="743094"/>
           </a:xfrm>
         </p:spPr>
         <p:txBody>
-          <a:bodyPr anchor="b"/>
+          <a:bodyPr anchor="ctr">
+            <a:normAutofit/>
+          </a:bodyPr>
           <a:lstStyle>
             <a:lvl1pPr marL="0" indent="0">
               <a:buNone/>
-              <a:defRPr sz="2400" b="1"/>
+              <a:defRPr sz="2100" b="1"/>
             </a:lvl1pPr>
             <a:lvl2pPr marL="457200" indent="0">
               <a:buNone/>
@@ -2834,13 +3098,41 @@
         </p:nvSpPr>
         <p:spPr>
           <a:xfrm>
-            <a:off x="6172200" y="2505075"/>
-            <a:ext cx="5183188" cy="3684588"/>
+            <a:off x="6231230" y="2656564"/>
+            <a:ext cx="4754880" cy="3566160"/>
           </a:xfrm>
         </p:spPr>
         <p:txBody>
           <a:bodyPr/>
-          <a:lstStyle/>
+          <a:lstStyle>
+            <a:lvl1pPr>
+              <a:defRPr sz="2200"/>
+            </a:lvl1pPr>
+            <a:lvl2pPr>
+              <a:defRPr sz="2000"/>
+            </a:lvl2pPr>
+            <a:lvl3pPr>
+              <a:defRPr sz="1800"/>
+            </a:lvl3pPr>
+            <a:lvl4pPr>
+              <a:defRPr sz="1600"/>
+            </a:lvl4pPr>
+            <a:lvl5pPr>
+              <a:defRPr sz="1600"/>
+            </a:lvl5pPr>
+            <a:lvl6pPr>
+              <a:defRPr sz="1600"/>
+            </a:lvl6pPr>
+            <a:lvl7pPr>
+              <a:defRPr sz="1600"/>
+            </a:lvl7pPr>
+            <a:lvl8pPr>
+              <a:defRPr sz="1600"/>
+            </a:lvl8pPr>
+            <a:lvl9pPr>
+              <a:defRPr sz="1600"/>
+            </a:lvl9pPr>
+          </a:lstStyle>
           <a:p>
             <a:pPr lvl="0"/>
             <a:r>
@@ -2875,7 +3167,7 @@
               <a:rPr lang="en-US" smtClean="0"/>
               <a:t>Fifth level</a:t>
             </a:r>
-            <a:endParaRPr lang="bg-BG"/>
+            <a:endParaRPr lang="en-US" dirty="0"/>
           </a:p>
         </p:txBody>
       </p:sp>
@@ -2896,7 +3188,7 @@
           <a:p>
             <a:fld id="{1FCAA85D-A80E-45D6-AD8D-1520FADD59BE}" type="datetimeFigureOut">
               <a:rPr lang="bg-BG" smtClean="0"/>
-              <a:t>27.4.2026 г.</a:t>
+              <a:t>30.4.2026 г.</a:t>
             </a:fld>
             <a:endParaRPr lang="bg-BG"/>
           </a:p>
@@ -2947,7 +3239,7 @@
     </p:spTree>
     <p:extLst>
       <p:ext uri="{BB962C8B-B14F-4D97-AF65-F5344CB8AC3E}">
-        <p14:creationId xmlns:p14="http://schemas.microsoft.com/office/powerpoint/2010/main" val="758057105"/>
+        <p14:creationId xmlns:p14="http://schemas.microsoft.com/office/powerpoint/2010/main" val="4003046845"/>
       </p:ext>
     </p:extLst>
   </p:cSld>
@@ -2993,7 +3285,7 @@
               <a:rPr lang="en-US" smtClean="0"/>
               <a:t>Click to edit Master title style</a:t>
             </a:r>
-            <a:endParaRPr lang="bg-BG"/>
+            <a:endParaRPr lang="en-US" dirty="0"/>
           </a:p>
         </p:txBody>
       </p:sp>
@@ -3014,7 +3306,7 @@
           <a:p>
             <a:fld id="{1FCAA85D-A80E-45D6-AD8D-1520FADD59BE}" type="datetimeFigureOut">
               <a:rPr lang="bg-BG" smtClean="0"/>
-              <a:t>27.4.2026 г.</a:t>
+              <a:t>30.4.2026 г.</a:t>
             </a:fld>
             <a:endParaRPr lang="bg-BG"/>
           </a:p>
@@ -3065,7 +3357,7 @@
     </p:spTree>
     <p:extLst>
       <p:ext uri="{BB962C8B-B14F-4D97-AF65-F5344CB8AC3E}">
-        <p14:creationId xmlns:p14="http://schemas.microsoft.com/office/powerpoint/2010/main" val="3390229409"/>
+        <p14:creationId xmlns:p14="http://schemas.microsoft.com/office/powerpoint/2010/main" val="2932172064"/>
       </p:ext>
     </p:extLst>
   </p:cSld>
@@ -3076,7 +3368,7 @@
 </file>
 
 <file path=ppt/slideLayouts/slideLayout7.xml><?xml version="1.0" encoding="utf-8"?>
-<p:sldLayout xmlns:a="http://schemas.openxmlformats.org/drawingml/2006/main" xmlns:r="http://schemas.openxmlformats.org/officeDocument/2006/relationships" xmlns:p="http://schemas.openxmlformats.org/presentationml/2006/main" type="blank" preserve="1">
+<p:sldLayout xmlns:a="http://schemas.openxmlformats.org/drawingml/2006/main" xmlns:r="http://schemas.openxmlformats.org/officeDocument/2006/relationships" xmlns:p="http://schemas.openxmlformats.org/presentationml/2006/main" showMasterSp="0" type="blank" preserve="1">
   <p:cSld name="Blank">
     <p:spTree>
       <p:nvGrpSpPr>
@@ -3109,7 +3401,7 @@
           <a:p>
             <a:fld id="{1FCAA85D-A80E-45D6-AD8D-1520FADD59BE}" type="datetimeFigureOut">
               <a:rPr lang="bg-BG" smtClean="0"/>
-              <a:t>27.4.2026 г.</a:t>
+              <a:t>30.4.2026 г.</a:t>
             </a:fld>
             <a:endParaRPr lang="bg-BG"/>
           </a:p>
@@ -3160,7 +3452,7 @@
     </p:spTree>
     <p:extLst>
       <p:ext uri="{BB962C8B-B14F-4D97-AF65-F5344CB8AC3E}">
-        <p14:creationId xmlns:p14="http://schemas.microsoft.com/office/powerpoint/2010/main" val="2941496846"/>
+        <p14:creationId xmlns:p14="http://schemas.microsoft.com/office/powerpoint/2010/main" val="601595078"/>
       </p:ext>
     </p:extLst>
   </p:cSld>
@@ -3189,50 +3481,41 @@
       </p:grpSpPr>
       <p:sp>
         <p:nvSpPr>
-          <p:cNvPr id="2" name="Title 1"/>
+          <p:cNvPr id="8" name="Title 7"/>
           <p:cNvSpPr>
             <a:spLocks noGrp="1"/>
           </p:cNvSpPr>
           <p:nvPr>
             <p:ph type="title"/>
+          </p:nvPr>
+        </p:nvSpPr>
+        <p:spPr/>
+        <p:txBody>
+          <a:bodyPr/>
+          <a:lstStyle/>
+          <a:p>
+            <a:r>
+              <a:rPr lang="en-US" smtClean="0"/>
+              <a:t>Click to edit Master title style</a:t>
+            </a:r>
+            <a:endParaRPr lang="en-US" dirty="0"/>
+          </a:p>
+        </p:txBody>
+      </p:sp>
+      <p:sp>
+        <p:nvSpPr>
+          <p:cNvPr id="3" name="Content Placeholder 2"/>
+          <p:cNvSpPr>
+            <a:spLocks noGrp="1"/>
+          </p:cNvSpPr>
+          <p:nvPr>
+            <p:ph idx="1"/>
           </p:nvPr>
         </p:nvSpPr>
         <p:spPr>
           <a:xfrm>
-            <a:off x="839788" y="457200"/>
-            <a:ext cx="3932237" cy="1600200"/>
-          </a:xfrm>
-        </p:spPr>
-        <p:txBody>
-          <a:bodyPr anchor="b"/>
-          <a:lstStyle>
-            <a:lvl1pPr>
-              <a:defRPr sz="3200"/>
-            </a:lvl1pPr>
-          </a:lstStyle>
-          <a:p>
-            <a:r>
-              <a:rPr lang="en-US" smtClean="0"/>
-              <a:t>Click to edit Master title style</a:t>
-            </a:r>
-            <a:endParaRPr lang="bg-BG"/>
-          </a:p>
-        </p:txBody>
-      </p:sp>
-      <p:sp>
-        <p:nvSpPr>
-          <p:cNvPr id="3" name="Content Placeholder 2"/>
-          <p:cNvSpPr>
-            <a:spLocks noGrp="1"/>
-          </p:cNvSpPr>
-          <p:nvPr>
-            <p:ph idx="1"/>
-          </p:nvPr>
-        </p:nvSpPr>
-        <p:spPr>
-          <a:xfrm>
-            <a:off x="5183188" y="987425"/>
-            <a:ext cx="6172200" cy="4873625"/>
+            <a:off x="1207008" y="2120054"/>
+            <a:ext cx="6126480" cy="4114800"/>
           </a:xfrm>
         </p:spPr>
         <p:txBody>
@@ -3300,7 +3583,7 @@
               <a:rPr lang="en-US" smtClean="0"/>
               <a:t>Fifth level</a:t>
             </a:r>
-            <a:endParaRPr lang="bg-BG"/>
+            <a:endParaRPr lang="en-US" dirty="0"/>
           </a:p>
         </p:txBody>
       </p:sp>
@@ -3316,48 +3599,53 @@
         </p:nvSpPr>
         <p:spPr>
           <a:xfrm>
-            <a:off x="839788" y="2057400"/>
-            <a:ext cx="3932237" cy="3811588"/>
+            <a:off x="7789023" y="2147486"/>
+            <a:ext cx="3200400" cy="3432319"/>
           </a:xfrm>
         </p:spPr>
         <p:txBody>
-          <a:bodyPr/>
+          <a:bodyPr>
+            <a:normAutofit/>
+          </a:bodyPr>
           <a:lstStyle>
             <a:lvl1pPr marL="0" indent="0">
-              <a:buNone/>
-              <a:defRPr sz="1600"/>
+              <a:lnSpc>
+                <a:spcPct val="95000"/>
+              </a:lnSpc>
+              <a:buNone/>
+              <a:defRPr sz="1800"/>
             </a:lvl1pPr>
             <a:lvl2pPr marL="457200" indent="0">
               <a:buNone/>
-              <a:defRPr sz="1400"/>
+              <a:defRPr sz="1200"/>
             </a:lvl2pPr>
             <a:lvl3pPr marL="914400" indent="0">
               <a:buNone/>
-              <a:defRPr sz="1200"/>
+              <a:defRPr sz="1000"/>
             </a:lvl3pPr>
             <a:lvl4pPr marL="1371600" indent="0">
               <a:buNone/>
-              <a:defRPr sz="1000"/>
+              <a:defRPr sz="900"/>
             </a:lvl4pPr>
             <a:lvl5pPr marL="1828800" indent="0">
               <a:buNone/>
-              <a:defRPr sz="1000"/>
+              <a:defRPr sz="900"/>
             </a:lvl5pPr>
             <a:lvl6pPr marL="2286000" indent="0">
               <a:buNone/>
-              <a:defRPr sz="1000"/>
+              <a:defRPr sz="900"/>
             </a:lvl6pPr>
             <a:lvl7pPr marL="2743200" indent="0">
               <a:buNone/>
-              <a:defRPr sz="1000"/>
+              <a:defRPr sz="900"/>
             </a:lvl7pPr>
             <a:lvl8pPr marL="3200400" indent="0">
               <a:buNone/>
-              <a:defRPr sz="1000"/>
+              <a:defRPr sz="900"/>
             </a:lvl8pPr>
             <a:lvl9pPr marL="3657600" indent="0">
               <a:buNone/>
-              <a:defRPr sz="1000"/>
+              <a:defRPr sz="900"/>
             </a:lvl9pPr>
           </a:lstStyle>
           <a:p>
@@ -3386,7 +3674,7 @@
           <a:p>
             <a:fld id="{1FCAA85D-A80E-45D6-AD8D-1520FADD59BE}" type="datetimeFigureOut">
               <a:rPr lang="bg-BG" smtClean="0"/>
-              <a:t>27.4.2026 г.</a:t>
+              <a:t>30.4.2026 г.</a:t>
             </a:fld>
             <a:endParaRPr lang="bg-BG"/>
           </a:p>
@@ -3437,7 +3725,7 @@
     </p:spTree>
     <p:extLst>
       <p:ext uri="{BB962C8B-B14F-4D97-AF65-F5344CB8AC3E}">
-        <p14:creationId xmlns:p14="http://schemas.microsoft.com/office/powerpoint/2010/main" val="4243725785"/>
+        <p14:creationId xmlns:p14="http://schemas.microsoft.com/office/powerpoint/2010/main" val="3359263406"/>
       </p:ext>
     </p:extLst>
   </p:cSld>
@@ -3466,58 +3754,61 @@
       </p:grpSpPr>
       <p:sp>
         <p:nvSpPr>
-          <p:cNvPr id="2" name="Title 1"/>
+          <p:cNvPr id="8" name="Title 7"/>
           <p:cNvSpPr>
             <a:spLocks noGrp="1"/>
           </p:cNvSpPr>
           <p:nvPr>
             <p:ph type="title"/>
+          </p:nvPr>
+        </p:nvSpPr>
+        <p:spPr/>
+        <p:txBody>
+          <a:bodyPr/>
+          <a:lstStyle/>
+          <a:p>
+            <a:r>
+              <a:rPr lang="en-US" smtClean="0"/>
+              <a:t>Click to edit Master title style</a:t>
+            </a:r>
+            <a:endParaRPr lang="en-US" dirty="0"/>
+          </a:p>
+        </p:txBody>
+      </p:sp>
+      <p:sp>
+        <p:nvSpPr>
+          <p:cNvPr id="3" name="Picture Placeholder 2"/>
+          <p:cNvSpPr>
+            <a:spLocks noGrp="1" noChangeAspect="1"/>
+          </p:cNvSpPr>
+          <p:nvPr>
+            <p:ph type="pic" idx="1"/>
           </p:nvPr>
         </p:nvSpPr>
         <p:spPr>
           <a:xfrm>
-            <a:off x="839788" y="457200"/>
-            <a:ext cx="3932237" cy="1600200"/>
+            <a:off x="1280160" y="2211494"/>
+            <a:ext cx="6126480" cy="3931920"/>
           </a:xfrm>
+          <a:solidFill>
+            <a:schemeClr val="tx2">
+              <a:lumMod val="60000"/>
+              <a:lumOff val="40000"/>
+            </a:schemeClr>
+          </a:solidFill>
         </p:spPr>
         <p:txBody>
-          <a:bodyPr anchor="b"/>
+          <a:bodyPr tIns="365760" anchor="t"/>
           <a:lstStyle>
-            <a:lvl1pPr>
-              <a:defRPr sz="3200"/>
-            </a:lvl1pPr>
-          </a:lstStyle>
-          <a:p>
-            <a:r>
-              <a:rPr lang="en-US" smtClean="0"/>
-              <a:t>Click to edit Master title style</a:t>
-            </a:r>
-            <a:endParaRPr lang="bg-BG"/>
-          </a:p>
-        </p:txBody>
-      </p:sp>
-      <p:sp>
-        <p:nvSpPr>
-          <p:cNvPr id="3" name="Picture Placeholder 2"/>
-          <p:cNvSpPr>
-            <a:spLocks noGrp="1"/>
-          </p:cNvSpPr>
-          <p:nvPr>
-            <p:ph type="pic" idx="1"/>
-          </p:nvPr>
-        </p:nvSpPr>
-        <p:spPr>
-          <a:xfrm>
-            <a:off x="5183188" y="987425"/>
-            <a:ext cx="6172200" cy="4873625"/>
-          </a:xfrm>
-        </p:spPr>
-        <p:txBody>
-          <a:bodyPr/>
-          <a:lstStyle>
-            <a:lvl1pPr marL="0" indent="0">
-              <a:buNone/>
-              <a:defRPr sz="3200"/>
+            <a:lvl1pPr marL="0" indent="0" algn="ctr">
+              <a:buNone/>
+              <a:defRPr sz="3200">
+                <a:solidFill>
+                  <a:schemeClr val="tx1">
+                    <a:lumMod val="50000"/>
+                  </a:schemeClr>
+                </a:solidFill>
+              </a:defRPr>
             </a:lvl1pPr>
             <a:lvl2pPr marL="457200" indent="0">
               <a:buNone/>
@@ -3553,7 +3844,11 @@
             </a:lvl9pPr>
           </a:lstStyle>
           <a:p>
-            <a:endParaRPr lang="bg-BG"/>
+            <a:r>
+              <a:rPr lang="en-US" smtClean="0"/>
+              <a:t>Click icon to add picture</a:t>
+            </a:r>
+            <a:endParaRPr lang="en-US" dirty="0"/>
           </a:p>
         </p:txBody>
       </p:sp>
@@ -3569,48 +3864,53 @@
         </p:nvSpPr>
         <p:spPr>
           <a:xfrm>
-            <a:off x="839788" y="2057400"/>
-            <a:ext cx="3932237" cy="3811588"/>
+            <a:off x="7790688" y="2150621"/>
+            <a:ext cx="3200400" cy="3429000"/>
           </a:xfrm>
         </p:spPr>
         <p:txBody>
-          <a:bodyPr/>
+          <a:bodyPr>
+            <a:normAutofit/>
+          </a:bodyPr>
           <a:lstStyle>
             <a:lvl1pPr marL="0" indent="0">
-              <a:buNone/>
-              <a:defRPr sz="1600"/>
+              <a:lnSpc>
+                <a:spcPct val="95000"/>
+              </a:lnSpc>
+              <a:buNone/>
+              <a:defRPr sz="1800"/>
             </a:lvl1pPr>
             <a:lvl2pPr marL="457200" indent="0">
               <a:buNone/>
-              <a:defRPr sz="1400"/>
+              <a:defRPr sz="1200"/>
             </a:lvl2pPr>
             <a:lvl3pPr marL="914400" indent="0">
               <a:buNone/>
-              <a:defRPr sz="1200"/>
+              <a:defRPr sz="1000"/>
             </a:lvl3pPr>
             <a:lvl4pPr marL="1371600" indent="0">
               <a:buNone/>
-              <a:defRPr sz="1000"/>
+              <a:defRPr sz="900"/>
             </a:lvl4pPr>
             <a:lvl5pPr marL="1828800" indent="0">
               <a:buNone/>
-              <a:defRPr sz="1000"/>
+              <a:defRPr sz="900"/>
             </a:lvl5pPr>
             <a:lvl6pPr marL="2286000" indent="0">
               <a:buNone/>
-              <a:defRPr sz="1000"/>
+              <a:defRPr sz="900"/>
             </a:lvl6pPr>
             <a:lvl7pPr marL="2743200" indent="0">
               <a:buNone/>
-              <a:defRPr sz="1000"/>
+              <a:defRPr sz="900"/>
             </a:lvl7pPr>
             <a:lvl8pPr marL="3200400" indent="0">
               <a:buNone/>
-              <a:defRPr sz="1000"/>
+              <a:defRPr sz="900"/>
             </a:lvl8pPr>
             <a:lvl9pPr marL="3657600" indent="0">
               <a:buNone/>
-              <a:defRPr sz="1000"/>
+              <a:defRPr sz="900"/>
             </a:lvl9pPr>
           </a:lstStyle>
           <a:p>
@@ -3639,7 +3939,7 @@
           <a:p>
             <a:fld id="{1FCAA85D-A80E-45D6-AD8D-1520FADD59BE}" type="datetimeFigureOut">
               <a:rPr lang="bg-BG" smtClean="0"/>
-              <a:t>27.4.2026 г.</a:t>
+              <a:t>30.4.2026 г.</a:t>
             </a:fld>
             <a:endParaRPr lang="bg-BG"/>
           </a:p>
@@ -3690,7 +3990,7 @@
     </p:spTree>
     <p:extLst>
       <p:ext uri="{BB962C8B-B14F-4D97-AF65-F5344CB8AC3E}">
-        <p14:creationId xmlns:p14="http://schemas.microsoft.com/office/powerpoint/2010/main" val="3107270629"/>
+        <p14:creationId xmlns:p14="http://schemas.microsoft.com/office/powerpoint/2010/main" val="537715219"/>
       </p:ext>
     </p:extLst>
   </p:cSld>
@@ -3705,7 +4005,7 @@
   <p:cSld>
     <p:bg>
       <p:bgRef idx="1001">
-        <a:schemeClr val="bg1"/>
+        <a:schemeClr val="bg2"/>
       </p:bgRef>
     </p:bg>
     <p:spTree>
@@ -3724,18 +4024,56 @@
       </p:grpSpPr>
       <p:sp>
         <p:nvSpPr>
-          <p:cNvPr id="2" name="Title Placeholder 1"/>
-          <p:cNvSpPr>
-            <a:spLocks noGrp="1"/>
-          </p:cNvSpPr>
-          <p:nvPr>
-            <p:ph type="title"/>
-          </p:nvPr>
+          <p:cNvPr id="7" name="Rectangle 6"/>
+          <p:cNvSpPr/>
+          <p:nvPr/>
         </p:nvSpPr>
         <p:spPr>
           <a:xfrm>
-            <a:off x="838200" y="365125"/>
-            <a:ext cx="10515600" cy="1325563"/>
+            <a:off x="483" y="176109"/>
+            <a:ext cx="12188952" cy="1645919"/>
+          </a:xfrm>
+          <a:prstGeom prst="rect">
+            <a:avLst/>
+          </a:prstGeom>
+          <a:solidFill>
+            <a:schemeClr val="tx1"/>
+          </a:solidFill>
+          <a:ln>
+            <a:noFill/>
+          </a:ln>
+        </p:spPr>
+        <p:style>
+          <a:lnRef idx="2">
+            <a:schemeClr val="accent1">
+              <a:shade val="50000"/>
+            </a:schemeClr>
+          </a:lnRef>
+          <a:fillRef idx="1">
+            <a:schemeClr val="accent1"/>
+          </a:fillRef>
+          <a:effectRef idx="0">
+            <a:schemeClr val="accent1"/>
+          </a:effectRef>
+          <a:fontRef idx="minor">
+            <a:schemeClr val="lt1"/>
+          </a:fontRef>
+        </p:style>
+      </p:sp>
+      <p:sp>
+        <p:nvSpPr>
+          <p:cNvPr id="2" name="Title Placeholder 1"/>
+          <p:cNvSpPr>
+            <a:spLocks noGrp="1"/>
+          </p:cNvSpPr>
+          <p:nvPr>
+            <p:ph type="title"/>
+          </p:nvPr>
+        </p:nvSpPr>
+        <p:spPr>
+          <a:xfrm>
+            <a:off x="1202919" y="284176"/>
+            <a:ext cx="9784080" cy="1508760"/>
           </a:xfrm>
           <a:prstGeom prst="rect">
             <a:avLst/>
@@ -3751,7 +4089,7 @@
               <a:rPr lang="en-US" smtClean="0"/>
               <a:t>Click to edit Master title style</a:t>
             </a:r>
-            <a:endParaRPr lang="bg-BG"/>
+            <a:endParaRPr lang="en-US" dirty="0"/>
           </a:p>
         </p:txBody>
       </p:sp>
@@ -3767,8 +4105,8 @@
         </p:nvSpPr>
         <p:spPr>
           <a:xfrm>
-            <a:off x="838200" y="1825625"/>
-            <a:ext cx="10515600" cy="4351338"/>
+            <a:off x="1202919" y="2011680"/>
+            <a:ext cx="9784080" cy="4206240"/>
           </a:xfrm>
           <a:prstGeom prst="rect">
             <a:avLst/>
@@ -3813,7 +4151,7 @@
               <a:rPr lang="en-US" smtClean="0"/>
               <a:t>Fifth level</a:t>
             </a:r>
-            <a:endParaRPr lang="bg-BG"/>
+            <a:endParaRPr lang="en-US" dirty="0"/>
           </a:p>
         </p:txBody>
       </p:sp>
@@ -3829,22 +4167,20 @@
         </p:nvSpPr>
         <p:spPr>
           <a:xfrm>
-            <a:off x="838200" y="6356350"/>
-            <a:ext cx="2743200" cy="365125"/>
+            <a:off x="1202266" y="6422854"/>
+            <a:ext cx="3000894" cy="365125"/>
           </a:xfrm>
           <a:prstGeom prst="rect">
             <a:avLst/>
           </a:prstGeom>
         </p:spPr>
         <p:txBody>
-          <a:bodyPr vert="horz" lIns="91440" tIns="45720" rIns="91440" bIns="45720" rtlCol="0" anchor="ctr"/>
+          <a:bodyPr vert="horz" lIns="91440" tIns="45720" rIns="45720" bIns="45720" rtlCol="0" anchor="ctr"/>
           <a:lstStyle>
             <a:lvl1pPr algn="l">
-              <a:defRPr sz="1200">
+              <a:defRPr sz="1050">
                 <a:solidFill>
-                  <a:schemeClr val="tx1">
-                    <a:tint val="75000"/>
-                  </a:schemeClr>
+                  <a:schemeClr val="tx1"/>
                 </a:solidFill>
               </a:defRPr>
             </a:lvl1pPr>
@@ -3852,7 +4188,7 @@
           <a:p>
             <a:fld id="{1FCAA85D-A80E-45D6-AD8D-1520FADD59BE}" type="datetimeFigureOut">
               <a:rPr lang="bg-BG" smtClean="0"/>
-              <a:t>27.4.2026 г.</a:t>
+              <a:t>30.4.2026 г.</a:t>
             </a:fld>
             <a:endParaRPr lang="bg-BG"/>
           </a:p>
@@ -3870,8 +4206,8 @@
         </p:nvSpPr>
         <p:spPr>
           <a:xfrm>
-            <a:off x="4038600" y="6356350"/>
-            <a:ext cx="4114800" cy="365125"/>
+            <a:off x="5596471" y="6422854"/>
+            <a:ext cx="5044440" cy="365125"/>
           </a:xfrm>
           <a:prstGeom prst="rect">
             <a:avLst/>
@@ -3880,12 +4216,10 @@
         <p:txBody>
           <a:bodyPr vert="horz" lIns="91440" tIns="45720" rIns="91440" bIns="45720" rtlCol="0" anchor="ctr"/>
           <a:lstStyle>
-            <a:lvl1pPr algn="ctr">
-              <a:defRPr sz="1200">
+            <a:lvl1pPr algn="r">
+              <a:defRPr sz="1050">
                 <a:solidFill>
-                  <a:schemeClr val="tx1">
-                    <a:tint val="75000"/>
-                  </a:schemeClr>
+                  <a:schemeClr val="tx1"/>
                 </a:solidFill>
               </a:defRPr>
             </a:lvl1pPr>
@@ -3907,22 +4241,20 @@
         </p:nvSpPr>
         <p:spPr>
           <a:xfrm>
-            <a:off x="8610600" y="6356350"/>
-            <a:ext cx="2743200" cy="365125"/>
+            <a:off x="10658927" y="6422854"/>
+            <a:ext cx="946264" cy="365125"/>
           </a:xfrm>
           <a:prstGeom prst="rect">
             <a:avLst/>
           </a:prstGeom>
         </p:spPr>
         <p:txBody>
-          <a:bodyPr vert="horz" lIns="91440" tIns="45720" rIns="91440" bIns="45720" rtlCol="0" anchor="ctr"/>
+          <a:bodyPr vert="horz" lIns="45720" tIns="45720" rIns="91440" bIns="45720" rtlCol="0" anchor="ctr"/>
           <a:lstStyle>
-            <a:lvl1pPr algn="r">
-              <a:defRPr sz="1200">
+            <a:lvl1pPr algn="l">
+              <a:defRPr sz="1200" b="0">
                 <a:solidFill>
-                  <a:schemeClr val="tx1">
-                    <a:tint val="75000"/>
-                  </a:schemeClr>
+                  <a:schemeClr val="tx1"/>
                 </a:solidFill>
               </a:defRPr>
             </a:lvl1pPr>
@@ -3939,37 +4271,37 @@
     </p:spTree>
     <p:extLst>
       <p:ext uri="{BB962C8B-B14F-4D97-AF65-F5344CB8AC3E}">
-        <p14:creationId xmlns:p14="http://schemas.microsoft.com/office/powerpoint/2010/main" val="840566753"/>
+        <p14:creationId xmlns:p14="http://schemas.microsoft.com/office/powerpoint/2010/main" val="328997754"/>
       </p:ext>
     </p:extLst>
   </p:cSld>
-  <p:clrMap bg1="lt1" tx1="dk1" bg2="lt2" tx2="dk2" accent1="accent1" accent2="accent2" accent3="accent3" accent4="accent4" accent5="accent5" accent6="accent6" hlink="hlink" folHlink="folHlink"/>
+  <p:clrMap bg1="dk1" tx1="lt1" bg2="dk2" tx2="lt2" accent1="accent1" accent2="accent2" accent3="accent3" accent4="accent4" accent5="accent5" accent6="accent6" hlink="hlink" folHlink="folHlink"/>
   <p:sldLayoutIdLst>
-    <p:sldLayoutId id="2147483649" r:id="rId1"/>
-    <p:sldLayoutId id="2147483650" r:id="rId2"/>
-    <p:sldLayoutId id="2147483651" r:id="rId3"/>
-    <p:sldLayoutId id="2147483652" r:id="rId4"/>
-    <p:sldLayoutId id="2147483653" r:id="rId5"/>
-    <p:sldLayoutId id="2147483654" r:id="rId6"/>
-    <p:sldLayoutId id="2147483655" r:id="rId7"/>
-    <p:sldLayoutId id="2147483656" r:id="rId8"/>
-    <p:sldLayoutId id="2147483657" r:id="rId9"/>
-    <p:sldLayoutId id="2147483658" r:id="rId10"/>
-    <p:sldLayoutId id="2147483659" r:id="rId11"/>
+    <p:sldLayoutId id="2147483673" r:id="rId1"/>
+    <p:sldLayoutId id="2147483674" r:id="rId2"/>
+    <p:sldLayoutId id="2147483675" r:id="rId3"/>
+    <p:sldLayoutId id="2147483676" r:id="rId4"/>
+    <p:sldLayoutId id="2147483677" r:id="rId5"/>
+    <p:sldLayoutId id="2147483678" r:id="rId6"/>
+    <p:sldLayoutId id="2147483679" r:id="rId7"/>
+    <p:sldLayoutId id="2147483680" r:id="rId8"/>
+    <p:sldLayoutId id="2147483681" r:id="rId9"/>
+    <p:sldLayoutId id="2147483682" r:id="rId10"/>
+    <p:sldLayoutId id="2147483683" r:id="rId11"/>
   </p:sldLayoutIdLst>
   <p:txStyles>
     <p:titleStyle>
       <a:lvl1pPr algn="l" defTabSz="914400" rtl="0" eaLnBrk="1" latinLnBrk="0" hangingPunct="1">
         <a:lnSpc>
-          <a:spcPct val="90000"/>
+          <a:spcPct val="85000"/>
         </a:lnSpc>
         <a:spcBef>
           <a:spcPct val="0"/>
         </a:spcBef>
         <a:buNone/>
-        <a:defRPr sz="4400" kern="1200">
+        <a:defRPr sz="4000" kern="1200" cap="all" baseline="0">
           <a:solidFill>
-            <a:schemeClr val="tx1"/>
+            <a:schemeClr val="bg2"/>
           </a:solidFill>
           <a:latin typeface="+mj-lt"/>
           <a:ea typeface="+mj-ea"/>
@@ -3978,16 +4310,22 @@
       </a:lvl1pPr>
     </p:titleStyle>
     <p:bodyStyle>
-      <a:lvl1pPr marL="228600" indent="-228600" algn="l" defTabSz="914400" rtl="0" eaLnBrk="1" latinLnBrk="0" hangingPunct="1">
+      <a:lvl1pPr marL="182880" indent="-182880" algn="l" defTabSz="914400" rtl="0" eaLnBrk="1" latinLnBrk="0" hangingPunct="1">
         <a:lnSpc>
           <a:spcPct val="90000"/>
         </a:lnSpc>
         <a:spcBef>
-          <a:spcPts val="1000"/>
+          <a:spcPts val="1200"/>
         </a:spcBef>
-        <a:buFont typeface="Arial" panose="020B0604020202020204" pitchFamily="34" charset="0"/>
-        <a:buChar char="•"/>
-        <a:defRPr sz="2800" kern="1200">
+        <a:spcAft>
+          <a:spcPts val="200"/>
+        </a:spcAft>
+        <a:buClr>
+          <a:schemeClr val="tx1"/>
+        </a:buClr>
+        <a:buFont typeface="Wingdings" pitchFamily="2" charset="2"/>
+        <a:buChar char=""/>
+        <a:defRPr sz="2200" kern="1200">
           <a:solidFill>
             <a:schemeClr val="tx1"/>
           </a:solidFill>
@@ -3996,16 +4334,22 @@
           <a:cs typeface="+mn-cs"/>
         </a:defRPr>
       </a:lvl1pPr>
-      <a:lvl2pPr marL="685800" indent="-228600" algn="l" defTabSz="914400" rtl="0" eaLnBrk="1" latinLnBrk="0" hangingPunct="1">
+      <a:lvl2pPr marL="411480" indent="-182880" algn="l" defTabSz="914400" rtl="0" eaLnBrk="1" latinLnBrk="0" hangingPunct="1">
         <a:lnSpc>
           <a:spcPct val="90000"/>
         </a:lnSpc>
         <a:spcBef>
-          <a:spcPts val="500"/>
+          <a:spcPts val="200"/>
         </a:spcBef>
-        <a:buFont typeface="Arial" panose="020B0604020202020204" pitchFamily="34" charset="0"/>
-        <a:buChar char="•"/>
-        <a:defRPr sz="2400" kern="1200">
+        <a:spcAft>
+          <a:spcPts val="400"/>
+        </a:spcAft>
+        <a:buClr>
+          <a:schemeClr val="tx1"/>
+        </a:buClr>
+        <a:buFont typeface="Wingdings" pitchFamily="2" charset="2"/>
+        <a:buChar char=""/>
+        <a:defRPr sz="2000" kern="1200">
           <a:solidFill>
             <a:schemeClr val="tx1"/>
           </a:solidFill>
@@ -4014,16 +4358,22 @@
           <a:cs typeface="+mn-cs"/>
         </a:defRPr>
       </a:lvl2pPr>
-      <a:lvl3pPr marL="1143000" indent="-228600" algn="l" defTabSz="914400" rtl="0" eaLnBrk="1" latinLnBrk="0" hangingPunct="1">
+      <a:lvl3pPr marL="640080" indent="-182880" algn="l" defTabSz="914400" rtl="0" eaLnBrk="1" latinLnBrk="0" hangingPunct="1">
         <a:lnSpc>
           <a:spcPct val="90000"/>
         </a:lnSpc>
         <a:spcBef>
-          <a:spcPts val="500"/>
+          <a:spcPts val="200"/>
         </a:spcBef>
-        <a:buFont typeface="Arial" panose="020B0604020202020204" pitchFamily="34" charset="0"/>
-        <a:buChar char="•"/>
-        <a:defRPr sz="2000" kern="1200">
+        <a:spcAft>
+          <a:spcPts val="400"/>
+        </a:spcAft>
+        <a:buClr>
+          <a:schemeClr val="tx1"/>
+        </a:buClr>
+        <a:buFont typeface="Wingdings" pitchFamily="2" charset="2"/>
+        <a:buChar char=""/>
+        <a:defRPr sz="1800" kern="1200">
           <a:solidFill>
             <a:schemeClr val="tx1"/>
           </a:solidFill>
@@ -4032,16 +4382,22 @@
           <a:cs typeface="+mn-cs"/>
         </a:defRPr>
       </a:lvl3pPr>
-      <a:lvl4pPr marL="1600200" indent="-228600" algn="l" defTabSz="914400" rtl="0" eaLnBrk="1" latinLnBrk="0" hangingPunct="1">
+      <a:lvl4pPr marL="868680" indent="-182880" algn="l" defTabSz="914400" rtl="0" eaLnBrk="1" latinLnBrk="0" hangingPunct="1">
         <a:lnSpc>
           <a:spcPct val="90000"/>
         </a:lnSpc>
         <a:spcBef>
-          <a:spcPts val="500"/>
+          <a:spcPts val="200"/>
         </a:spcBef>
-        <a:buFont typeface="Arial" panose="020B0604020202020204" pitchFamily="34" charset="0"/>
-        <a:buChar char="•"/>
-        <a:defRPr sz="1800" kern="1200">
+        <a:spcAft>
+          <a:spcPts val="400"/>
+        </a:spcAft>
+        <a:buClr>
+          <a:schemeClr val="tx1"/>
+        </a:buClr>
+        <a:buFont typeface="Wingdings" pitchFamily="2" charset="2"/>
+        <a:buChar char=""/>
+        <a:defRPr sz="1600" kern="1200">
           <a:solidFill>
             <a:schemeClr val="tx1"/>
           </a:solidFill>
@@ -4050,16 +4406,22 @@
           <a:cs typeface="+mn-cs"/>
         </a:defRPr>
       </a:lvl4pPr>
-      <a:lvl5pPr marL="2057400" indent="-228600" algn="l" defTabSz="914400" rtl="0" eaLnBrk="1" latinLnBrk="0" hangingPunct="1">
+      <a:lvl5pPr marL="1097280" indent="-182880" algn="l" defTabSz="914400" rtl="0" eaLnBrk="1" latinLnBrk="0" hangingPunct="1">
         <a:lnSpc>
           <a:spcPct val="90000"/>
         </a:lnSpc>
         <a:spcBef>
-          <a:spcPts val="500"/>
+          <a:spcPts val="200"/>
         </a:spcBef>
-        <a:buFont typeface="Arial" panose="020B0604020202020204" pitchFamily="34" charset="0"/>
-        <a:buChar char="•"/>
-        <a:defRPr sz="1800" kern="1200">
+        <a:spcAft>
+          <a:spcPts val="400"/>
+        </a:spcAft>
+        <a:buClr>
+          <a:schemeClr val="tx1"/>
+        </a:buClr>
+        <a:buFont typeface="Wingdings" pitchFamily="2" charset="2"/>
+        <a:buChar char=""/>
+        <a:defRPr sz="1600" kern="1200">
           <a:solidFill>
             <a:schemeClr val="tx1"/>
           </a:solidFill>
@@ -4068,16 +4430,22 @@
           <a:cs typeface="+mn-cs"/>
         </a:defRPr>
       </a:lvl5pPr>
-      <a:lvl6pPr marL="2514600" indent="-228600" algn="l" defTabSz="914400" rtl="0" eaLnBrk="1" latinLnBrk="0" hangingPunct="1">
+      <a:lvl6pPr marL="1284600" indent="-228600" algn="l" defTabSz="914400" rtl="0" eaLnBrk="1" latinLnBrk="0" hangingPunct="1">
         <a:lnSpc>
           <a:spcPct val="90000"/>
         </a:lnSpc>
         <a:spcBef>
-          <a:spcPts val="500"/>
+          <a:spcPts val="200"/>
         </a:spcBef>
-        <a:buFont typeface="Arial" panose="020B0604020202020204" pitchFamily="34" charset="0"/>
-        <a:buChar char="•"/>
-        <a:defRPr sz="1800" kern="1200">
+        <a:spcAft>
+          <a:spcPts val="400"/>
+        </a:spcAft>
+        <a:buClr>
+          <a:schemeClr val="tx1"/>
+        </a:buClr>
+        <a:buFont typeface="Wingdings" pitchFamily="2" charset="2"/>
+        <a:buChar char=""/>
+        <a:defRPr sz="1600" kern="1200">
           <a:solidFill>
             <a:schemeClr val="tx1"/>
           </a:solidFill>
@@ -4086,16 +4454,22 @@
           <a:cs typeface="+mn-cs"/>
         </a:defRPr>
       </a:lvl6pPr>
-      <a:lvl7pPr marL="2971800" indent="-228600" algn="l" defTabSz="914400" rtl="0" eaLnBrk="1" latinLnBrk="0" hangingPunct="1">
+      <a:lvl7pPr marL="1471800" indent="-228600" algn="l" defTabSz="914400" rtl="0" eaLnBrk="1" latinLnBrk="0" hangingPunct="1">
         <a:lnSpc>
           <a:spcPct val="90000"/>
         </a:lnSpc>
         <a:spcBef>
-          <a:spcPts val="500"/>
+          <a:spcPts val="200"/>
         </a:spcBef>
-        <a:buFont typeface="Arial" panose="020B0604020202020204" pitchFamily="34" charset="0"/>
-        <a:buChar char="•"/>
-        <a:defRPr sz="1800" kern="1200">
+        <a:spcAft>
+          <a:spcPts val="400"/>
+        </a:spcAft>
+        <a:buClr>
+          <a:schemeClr val="tx1"/>
+        </a:buClr>
+        <a:buFont typeface="Wingdings" pitchFamily="2" charset="2"/>
+        <a:buChar char=""/>
+        <a:defRPr sz="1600" kern="1200">
           <a:solidFill>
             <a:schemeClr val="tx1"/>
           </a:solidFill>
@@ -4104,16 +4478,22 @@
           <a:cs typeface="+mn-cs"/>
         </a:defRPr>
       </a:lvl7pPr>
-      <a:lvl8pPr marL="3429000" indent="-228600" algn="l" defTabSz="914400" rtl="0" eaLnBrk="1" latinLnBrk="0" hangingPunct="1">
+      <a:lvl8pPr marL="1629000" indent="-228600" algn="l" defTabSz="914400" rtl="0" eaLnBrk="1" latinLnBrk="0" hangingPunct="1">
         <a:lnSpc>
           <a:spcPct val="90000"/>
         </a:lnSpc>
         <a:spcBef>
-          <a:spcPts val="500"/>
+          <a:spcPts val="200"/>
         </a:spcBef>
-        <a:buFont typeface="Arial" panose="020B0604020202020204" pitchFamily="34" charset="0"/>
-        <a:buChar char="•"/>
-        <a:defRPr sz="1800" kern="1200">
+        <a:spcAft>
+          <a:spcPts val="400"/>
+        </a:spcAft>
+        <a:buClr>
+          <a:schemeClr val="tx1"/>
+        </a:buClr>
+        <a:buFont typeface="Wingdings" pitchFamily="2" charset="2"/>
+        <a:buChar char=""/>
+        <a:defRPr sz="1600" kern="1200">
           <a:solidFill>
             <a:schemeClr val="tx1"/>
           </a:solidFill>
@@ -4122,16 +4502,22 @@
           <a:cs typeface="+mn-cs"/>
         </a:defRPr>
       </a:lvl8pPr>
-      <a:lvl9pPr marL="3886200" indent="-228600" algn="l" defTabSz="914400" rtl="0" eaLnBrk="1" latinLnBrk="0" hangingPunct="1">
+      <a:lvl9pPr marL="1806200" indent="-228600" algn="l" defTabSz="914400" rtl="0" eaLnBrk="1" latinLnBrk="0" hangingPunct="1">
         <a:lnSpc>
           <a:spcPct val="90000"/>
         </a:lnSpc>
         <a:spcBef>
-          <a:spcPts val="500"/>
+          <a:spcPts val="200"/>
         </a:spcBef>
-        <a:buFont typeface="Arial" panose="020B0604020202020204" pitchFamily="34" charset="0"/>
-        <a:buChar char="•"/>
-        <a:defRPr sz="1800" kern="1200">
+        <a:spcAft>
+          <a:spcPts val="400"/>
+        </a:spcAft>
+        <a:buClr>
+          <a:schemeClr val="tx1"/>
+        </a:buClr>
+        <a:buFont typeface="Wingdings" pitchFamily="2" charset="2"/>
+        <a:buChar char=""/>
+        <a:defRPr sz="1600" kern="1200">
           <a:solidFill>
             <a:schemeClr val="tx1"/>
           </a:solidFill>
@@ -4143,7 +4529,7 @@
     </p:bodyStyle>
     <p:otherStyle>
       <a:defPPr>
-        <a:defRPr lang="bg-BG"/>
+        <a:defRPr lang="en-US"/>
       </a:defPPr>
       <a:lvl1pPr marL="0" algn="l" defTabSz="914400" rtl="0" eaLnBrk="1" latinLnBrk="0" hangingPunct="1">
         <a:defRPr sz="1800" kern="1200">
@@ -4264,32 +4650,95 @@
             <a:spLocks noGrp="1"/>
           </p:cNvSpPr>
           <p:nvPr>
-            <p:ph type="ctrTitle"/>
+            <p:ph type="title"/>
           </p:nvPr>
         </p:nvSpPr>
         <p:spPr>
           <a:xfrm>
-            <a:off x="1098698" y="-1193800"/>
-            <a:ext cx="9144000" cy="2387600"/>
+            <a:off x="3137095" y="1488558"/>
+            <a:ext cx="7090117" cy="537190"/>
           </a:xfrm>
         </p:spPr>
         <p:txBody>
-          <a:bodyPr/>
-          <a:lstStyle/>
-          <a:p>
-            <a:r>
-              <a:rPr lang="en-US" b="1" dirty="0" smtClean="0">
+          <a:bodyPr>
+            <a:noAutofit/>
+          </a:bodyPr>
+          <a:lstStyle/>
+          <a:p>
+            <a:r>
+              <a:rPr lang="bg-BG" sz="4000" dirty="0" smtClean="0">
+                <a:solidFill>
+                  <a:schemeClr val="tx2"/>
+                </a:solidFill>
+                <a:latin typeface="Bookman Old Style" panose="02050604050505020204" pitchFamily="18" charset="0"/>
+                <a:ea typeface="Calibri" panose="020F0502020204030204" pitchFamily="34" charset="0"/>
+                <a:cs typeface="Calibri" panose="020F0502020204030204" pitchFamily="34" charset="0"/>
+              </a:rPr>
+              <a:t>Тема</a:t>
+            </a:r>
+            <a:r>
+              <a:rPr lang="en-US" sz="4000" dirty="0" smtClean="0">
+                <a:solidFill>
+                  <a:schemeClr val="tx2"/>
+                </a:solidFill>
+                <a:latin typeface="Bookman Old Style" panose="02050604050505020204" pitchFamily="18" charset="0"/>
+                <a:ea typeface="Calibri" panose="020F0502020204030204" pitchFamily="34" charset="0"/>
+                <a:cs typeface="Calibri" panose="020F0502020204030204" pitchFamily="34" charset="0"/>
+              </a:rPr>
+              <a:t>:Wake on Lan</a:t>
+            </a:r>
+            <a:endParaRPr lang="bg-BG" sz="4000" dirty="0">
+              <a:solidFill>
+                <a:schemeClr val="tx2"/>
+              </a:solidFill>
+              <a:latin typeface="Bookman Old Style" panose="02050604050505020204" pitchFamily="18" charset="0"/>
+              <a:ea typeface="Calibri" panose="020F0502020204030204" pitchFamily="34" charset="0"/>
+              <a:cs typeface="Calibri" panose="020F0502020204030204" pitchFamily="34" charset="0"/>
+            </a:endParaRPr>
+          </a:p>
+        </p:txBody>
+      </p:sp>
+      <p:sp>
+        <p:nvSpPr>
+          <p:cNvPr id="4" name="Text Placeholder 3"/>
+          <p:cNvSpPr>
+            <a:spLocks noGrp="1"/>
+          </p:cNvSpPr>
+          <p:nvPr>
+            <p:ph type="body" idx="1"/>
+          </p:nvPr>
+        </p:nvSpPr>
+        <p:spPr>
+          <a:xfrm>
+            <a:off x="7623985" y="6337692"/>
+            <a:ext cx="3910819" cy="520308"/>
+          </a:xfrm>
+        </p:spPr>
+        <p:txBody>
+          <a:bodyPr>
+            <a:normAutofit/>
+          </a:bodyPr>
+          <a:lstStyle/>
+          <a:p>
+            <a:r>
+              <a:rPr lang="bg-BG" dirty="0" smtClean="0">
                 <a:latin typeface="Bookman Old Style" panose="02050604050505020204" pitchFamily="18" charset="0"/>
               </a:rPr>
-              <a:t>Wake-on-LAN </a:t>
-            </a:r>
-            <a:r>
-              <a:rPr lang="bg-BG" b="1" dirty="0" smtClean="0">
+              <a:t>Дипломант</a:t>
+            </a:r>
+            <a:r>
+              <a:rPr lang="en-US" dirty="0" smtClean="0">
                 <a:latin typeface="Bookman Old Style" panose="02050604050505020204" pitchFamily="18" charset="0"/>
               </a:rPr>
-              <a:t>сървър</a:t>
-            </a:r>
-            <a:endParaRPr lang="bg-BG" b="1" dirty="0">
+              <a:t>: </a:t>
+            </a:r>
+            <a:r>
+              <a:rPr lang="bg-BG" dirty="0" smtClean="0">
+                <a:latin typeface="Bookman Old Style" panose="02050604050505020204" pitchFamily="18" charset="0"/>
+              </a:rPr>
+              <a:t>Фериз Ходжа</a:t>
+            </a:r>
+            <a:endParaRPr lang="bg-BG" dirty="0">
               <a:latin typeface="Bookman Old Style" panose="02050604050505020204" pitchFamily="18" charset="0"/>
             </a:endParaRPr>
           </a:p>
@@ -4310,7 +4759,7 @@
         </p:blipFill>
         <p:spPr>
           <a:xfrm>
-            <a:off x="2013098" y="2041451"/>
+            <a:off x="308785" y="2600511"/>
             <a:ext cx="7315200" cy="5369442"/>
           </a:xfrm>
           <a:prstGeom prst="rect">
@@ -4324,6 +4773,64 @@
           </a:effectLst>
         </p:spPr>
       </p:pic>
+      <p:pic>
+        <p:nvPicPr>
+          <p:cNvPr id="9" name="Picture 8"/>
+          <p:cNvPicPr>
+            <a:picLocks noChangeAspect="1"/>
+          </p:cNvPicPr>
+          <p:nvPr/>
+        </p:nvPicPr>
+        <p:blipFill>
+          <a:blip r:embed="rId4"/>
+          <a:stretch>
+            <a:fillRect/>
+          </a:stretch>
+        </p:blipFill>
+        <p:spPr>
+          <a:xfrm>
+            <a:off x="308785" y="175582"/>
+            <a:ext cx="801332" cy="935766"/>
+          </a:xfrm>
+          <a:prstGeom prst="rect">
+            <a:avLst/>
+          </a:prstGeom>
+        </p:spPr>
+      </p:pic>
+      <p:sp>
+        <p:nvSpPr>
+          <p:cNvPr id="10" name="Rectangle 9"/>
+          <p:cNvSpPr/>
+          <p:nvPr/>
+        </p:nvSpPr>
+        <p:spPr>
+          <a:xfrm>
+            <a:off x="1110117" y="175582"/>
+            <a:ext cx="7175754" cy="923330"/>
+          </a:xfrm>
+          <a:prstGeom prst="rect">
+            <a:avLst/>
+          </a:prstGeom>
+        </p:spPr>
+        <p:txBody>
+          <a:bodyPr wrap="square">
+            <a:spAutoFit/>
+          </a:bodyPr>
+          <a:lstStyle/>
+          <a:p>
+            <a:pPr algn="ctr"/>
+            <a:r>
+              <a:rPr lang="ru-RU" b="1" i="1" dirty="0">
+                <a:latin typeface="Sitka Display" pitchFamily="2" charset="0"/>
+              </a:rPr>
+              <a:t>ДЪРЖАВЕН ИЗПИТ ЗА ПРИДОБИВАНЕ НА ТРЕТА СТЕПЕН НА ПРОФЕСИОНАЛНА КВАЛИФИКАЦИЯ – ЧАСТ ПО ТЕОРИЯ НА ПРОФЕСИЯТА</a:t>
+            </a:r>
+            <a:endParaRPr lang="bg-BG" b="1" i="1" dirty="0">
+              <a:latin typeface="Sitka Display" pitchFamily="2" charset="0"/>
+            </a:endParaRPr>
+          </a:p>
+        </p:txBody>
+      </p:sp>
     </p:spTree>
     <p:extLst>
       <p:ext uri="{BB962C8B-B14F-4D97-AF65-F5344CB8AC3E}">
@@ -4356,7 +4863,7 @@
       </p:grpSpPr>
       <p:sp>
         <p:nvSpPr>
-          <p:cNvPr id="2" name="Title 1"/>
+          <p:cNvPr id="4" name="Title 3"/>
           <p:cNvSpPr>
             <a:spLocks noGrp="1"/>
           </p:cNvSpPr>
@@ -4369,13 +4876,13 @@
           <a:bodyPr/>
           <a:lstStyle/>
           <a:p>
-            <a:endParaRPr lang="bg-BG"/>
-          </a:p>
-        </p:txBody>
-      </p:sp>
-      <p:sp>
-        <p:nvSpPr>
-          <p:cNvPr id="3" name="Content Placeholder 2"/>
+            <a:endParaRPr lang="bg-BG" dirty="0"/>
+          </a:p>
+        </p:txBody>
+      </p:sp>
+      <p:sp>
+        <p:nvSpPr>
+          <p:cNvPr id="5" name="Content Placeholder 4"/>
           <p:cNvSpPr>
             <a:spLocks noGrp="1"/>
           </p:cNvSpPr>
@@ -4383,12 +4890,27 @@
             <p:ph idx="1"/>
           </p:nvPr>
         </p:nvSpPr>
-        <p:spPr/>
-        <p:txBody>
-          <a:bodyPr/>
-          <a:lstStyle/>
-          <a:p>
-            <a:endParaRPr lang="bg-BG" dirty="0"/>
+        <p:spPr>
+          <a:xfrm>
+            <a:off x="1202919" y="3643532"/>
+            <a:ext cx="9784080" cy="731520"/>
+          </a:xfrm>
+        </p:spPr>
+        <p:txBody>
+          <a:bodyPr>
+            <a:normAutofit/>
+          </a:bodyPr>
+          <a:lstStyle/>
+          <a:p>
+            <a:r>
+              <a:rPr lang="bg-BG" sz="3600" dirty="0" smtClean="0">
+                <a:latin typeface="Bookman Old Style" panose="02050604050505020204" pitchFamily="18" charset="0"/>
+              </a:rPr>
+              <a:t>Благодаря за вниманието</a:t>
+            </a:r>
+            <a:endParaRPr lang="bg-BG" sz="3600" dirty="0">
+              <a:latin typeface="Bookman Old Style" panose="02050604050505020204" pitchFamily="18" charset="0"/>
+            </a:endParaRPr>
           </a:p>
         </p:txBody>
       </p:sp>
@@ -4432,7 +4954,12 @@
             <p:ph type="title"/>
           </p:nvPr>
         </p:nvSpPr>
-        <p:spPr/>
+        <p:spPr>
+          <a:xfrm>
+            <a:off x="562406" y="-1112926"/>
+            <a:ext cx="4262811" cy="4601183"/>
+          </a:xfrm>
+        </p:spPr>
         <p:txBody>
           <a:bodyPr/>
           <a:lstStyle/>
@@ -4441,7 +4968,7 @@
               <a:rPr lang="bg-BG" dirty="0" smtClean="0">
                 <a:latin typeface="Bookman Old Style" panose="02050604050505020204" pitchFamily="18" charset="0"/>
               </a:rPr>
-              <a:t>Актуалности</a:t>
+              <a:t>Актуалност</a:t>
             </a:r>
             <a:endParaRPr lang="bg-BG" dirty="0">
               <a:latin typeface="Bookman Old Style" panose="02050604050505020204" pitchFamily="18" charset="0"/>
@@ -4467,8 +4994,8 @@
         </p:blipFill>
         <p:spPr>
           <a:xfrm>
-            <a:off x="4982240" y="1913861"/>
-            <a:ext cx="7209760" cy="4686651"/>
+            <a:off x="3429642" y="1926957"/>
+            <a:ext cx="5584347" cy="4206875"/>
           </a:xfrm>
           <a:prstGeom prst="rect">
             <a:avLst/>
@@ -4521,34 +5048,61 @@
             <p:ph type="title"/>
           </p:nvPr>
         </p:nvSpPr>
-        <p:spPr/>
-        <p:txBody>
-          <a:bodyPr/>
-          <a:lstStyle/>
-          <a:p>
-            <a:endParaRPr lang="bg-BG"/>
-          </a:p>
-        </p:txBody>
-      </p:sp>
-      <p:sp>
-        <p:nvSpPr>
-          <p:cNvPr id="3" name="Content Placeholder 2"/>
-          <p:cNvSpPr>
-            <a:spLocks noGrp="1"/>
-          </p:cNvSpPr>
+        <p:spPr>
+          <a:xfrm>
+            <a:off x="1462741" y="-972250"/>
+            <a:ext cx="6077542" cy="4601183"/>
+          </a:xfrm>
+        </p:spPr>
+        <p:txBody>
+          <a:bodyPr/>
+          <a:lstStyle/>
+          <a:p>
+            <a:pPr algn="ctr"/>
+            <a:r>
+              <a:rPr lang="bg-BG" dirty="0" smtClean="0">
+                <a:latin typeface="Bookman Old Style" panose="02050604050505020204" pitchFamily="18" charset="0"/>
+              </a:rPr>
+              <a:t>Цел на проекта</a:t>
+            </a:r>
+            <a:endParaRPr lang="bg-BG" dirty="0">
+              <a:latin typeface="Bookman Old Style" panose="02050604050505020204" pitchFamily="18" charset="0"/>
+            </a:endParaRPr>
+          </a:p>
+        </p:txBody>
+      </p:sp>
+      <p:pic>
+        <p:nvPicPr>
+          <p:cNvPr id="4" name="Content Placeholder 3"/>
+          <p:cNvPicPr>
+            <a:picLocks noGrp="1" noChangeAspect="1"/>
+          </p:cNvPicPr>
           <p:nvPr>
             <p:ph idx="1"/>
           </p:nvPr>
-        </p:nvSpPr>
-        <p:spPr/>
-        <p:txBody>
-          <a:bodyPr/>
-          <a:lstStyle/>
-          <a:p>
-            <a:endParaRPr lang="bg-BG"/>
-          </a:p>
-        </p:txBody>
-      </p:sp>
+        </p:nvPicPr>
+        <p:blipFill>
+          <a:blip r:embed="rId3"/>
+          <a:stretch>
+            <a:fillRect/>
+          </a:stretch>
+        </p:blipFill>
+        <p:spPr>
+          <a:xfrm>
+            <a:off x="1888331" y="2011363"/>
+            <a:ext cx="8413750" cy="4206875"/>
+          </a:xfrm>
+          <a:prstGeom prst="rect">
+            <a:avLst/>
+          </a:prstGeom>
+          <a:ln>
+            <a:noFill/>
+          </a:ln>
+          <a:effectLst>
+            <a:softEdge rad="112500"/>
+          </a:effectLst>
+        </p:spPr>
+      </p:pic>
     </p:spTree>
     <p:extLst>
       <p:ext uri="{BB962C8B-B14F-4D97-AF65-F5344CB8AC3E}">
@@ -4594,29 +5148,51 @@
           <a:bodyPr/>
           <a:lstStyle/>
           <a:p>
-            <a:endParaRPr lang="bg-BG"/>
-          </a:p>
-        </p:txBody>
-      </p:sp>
-      <p:sp>
-        <p:nvSpPr>
-          <p:cNvPr id="3" name="Content Placeholder 2"/>
-          <p:cNvSpPr>
-            <a:spLocks noGrp="1"/>
-          </p:cNvSpPr>
+            <a:pPr algn="ctr"/>
+            <a:r>
+              <a:rPr lang="bg-BG" dirty="0" smtClean="0">
+                <a:latin typeface="Bookman Old Style" panose="02050604050505020204" pitchFamily="18" charset="0"/>
+              </a:rPr>
+              <a:t>Основни задачи</a:t>
+            </a:r>
+            <a:endParaRPr lang="bg-BG" dirty="0">
+              <a:latin typeface="Bookman Old Style" panose="02050604050505020204" pitchFamily="18" charset="0"/>
+            </a:endParaRPr>
+          </a:p>
+        </p:txBody>
+      </p:sp>
+      <p:pic>
+        <p:nvPicPr>
+          <p:cNvPr id="4" name="Content Placeholder 3"/>
+          <p:cNvPicPr>
+            <a:picLocks noGrp="1" noChangeAspect="1"/>
+          </p:cNvPicPr>
           <p:nvPr>
             <p:ph idx="1"/>
           </p:nvPr>
-        </p:nvSpPr>
-        <p:spPr/>
-        <p:txBody>
-          <a:bodyPr/>
-          <a:lstStyle/>
-          <a:p>
-            <a:endParaRPr lang="bg-BG"/>
-          </a:p>
-        </p:txBody>
-      </p:sp>
+        </p:nvPicPr>
+        <p:blipFill>
+          <a:blip r:embed="rId3"/>
+          <a:stretch>
+            <a:fillRect/>
+          </a:stretch>
+        </p:blipFill>
+        <p:spPr>
+          <a:xfrm>
+            <a:off x="3585369" y="2214563"/>
+            <a:ext cx="5019675" cy="3800475"/>
+          </a:xfrm>
+          <a:prstGeom prst="rect">
+            <a:avLst/>
+          </a:prstGeom>
+          <a:ln>
+            <a:noFill/>
+          </a:ln>
+          <a:effectLst>
+            <a:softEdge rad="112500"/>
+          </a:effectLst>
+        </p:spPr>
+      </p:pic>
     </p:spTree>
     <p:extLst>
       <p:ext uri="{BB962C8B-B14F-4D97-AF65-F5344CB8AC3E}">
@@ -4662,29 +5238,51 @@
           <a:bodyPr/>
           <a:lstStyle/>
           <a:p>
-            <a:endParaRPr lang="bg-BG"/>
-          </a:p>
-        </p:txBody>
-      </p:sp>
-      <p:sp>
-        <p:nvSpPr>
-          <p:cNvPr id="3" name="Content Placeholder 2"/>
-          <p:cNvSpPr>
-            <a:spLocks noGrp="1"/>
-          </p:cNvSpPr>
+            <a:pPr algn="ctr"/>
+            <a:r>
+              <a:rPr lang="bg-BG" dirty="0" smtClean="0">
+                <a:latin typeface="Bookman Old Style" panose="02050604050505020204" pitchFamily="18" charset="0"/>
+              </a:rPr>
+              <a:t>Теоретична основа</a:t>
+            </a:r>
+            <a:endParaRPr lang="bg-BG" dirty="0">
+              <a:latin typeface="Bookman Old Style" panose="02050604050505020204" pitchFamily="18" charset="0"/>
+            </a:endParaRPr>
+          </a:p>
+        </p:txBody>
+      </p:sp>
+      <p:pic>
+        <p:nvPicPr>
+          <p:cNvPr id="6" name="Content Placeholder 5"/>
+          <p:cNvPicPr>
+            <a:picLocks noGrp="1" noChangeAspect="1"/>
+          </p:cNvPicPr>
           <p:nvPr>
             <p:ph idx="1"/>
           </p:nvPr>
-        </p:nvSpPr>
-        <p:spPr/>
-        <p:txBody>
-          <a:bodyPr/>
-          <a:lstStyle/>
-          <a:p>
-            <a:endParaRPr lang="bg-BG"/>
-          </a:p>
-        </p:txBody>
-      </p:sp>
+        </p:nvPicPr>
+        <p:blipFill>
+          <a:blip r:embed="rId3"/>
+          <a:stretch>
+            <a:fillRect/>
+          </a:stretch>
+        </p:blipFill>
+        <p:spPr>
+          <a:xfrm>
+            <a:off x="731644" y="1849902"/>
+            <a:ext cx="7830042" cy="5008098"/>
+          </a:xfrm>
+          <a:prstGeom prst="rect">
+            <a:avLst/>
+          </a:prstGeom>
+          <a:ln>
+            <a:noFill/>
+          </a:ln>
+          <a:effectLst>
+            <a:softEdge rad="112500"/>
+          </a:effectLst>
+        </p:spPr>
+      </p:pic>
     </p:spTree>
     <p:extLst>
       <p:ext uri="{BB962C8B-B14F-4D97-AF65-F5344CB8AC3E}">
@@ -4725,34 +5323,60 @@
             <p:ph type="title"/>
           </p:nvPr>
         </p:nvSpPr>
-        <p:spPr/>
-        <p:txBody>
-          <a:bodyPr/>
-          <a:lstStyle/>
-          <a:p>
-            <a:endParaRPr lang="bg-BG"/>
-          </a:p>
-        </p:txBody>
-      </p:sp>
-      <p:sp>
-        <p:nvSpPr>
-          <p:cNvPr id="3" name="Content Placeholder 2"/>
-          <p:cNvSpPr>
-            <a:spLocks noGrp="1"/>
-          </p:cNvSpPr>
+        <p:spPr>
+          <a:xfrm>
+            <a:off x="1997312" y="-1126994"/>
+            <a:ext cx="4769248" cy="4601183"/>
+          </a:xfrm>
+        </p:spPr>
+        <p:txBody>
+          <a:bodyPr/>
+          <a:lstStyle/>
+          <a:p>
+            <a:r>
+              <a:rPr lang="bg-BG" dirty="0" smtClean="0">
+                <a:latin typeface="Bookman Old Style" panose="02050604050505020204" pitchFamily="18" charset="0"/>
+              </a:rPr>
+              <a:t>Архитектура</a:t>
+            </a:r>
+            <a:endParaRPr lang="bg-BG" dirty="0">
+              <a:latin typeface="Bookman Old Style" panose="02050604050505020204" pitchFamily="18" charset="0"/>
+            </a:endParaRPr>
+          </a:p>
+        </p:txBody>
+      </p:sp>
+      <p:pic>
+        <p:nvPicPr>
+          <p:cNvPr id="4" name="Content Placeholder 3"/>
+          <p:cNvPicPr>
+            <a:picLocks noGrp="1" noChangeAspect="1"/>
+          </p:cNvPicPr>
           <p:nvPr>
             <p:ph idx="1"/>
           </p:nvPr>
-        </p:nvSpPr>
-        <p:spPr/>
-        <p:txBody>
-          <a:bodyPr/>
-          <a:lstStyle/>
-          <a:p>
-            <a:endParaRPr lang="bg-BG"/>
-          </a:p>
-        </p:txBody>
-      </p:sp>
+        </p:nvPicPr>
+        <p:blipFill>
+          <a:blip r:embed="rId3"/>
+          <a:stretch>
+            <a:fillRect/>
+          </a:stretch>
+        </p:blipFill>
+        <p:spPr>
+          <a:xfrm>
+            <a:off x="2626445" y="1870686"/>
+            <a:ext cx="7612772" cy="4206875"/>
+          </a:xfrm>
+          <a:prstGeom prst="rect">
+            <a:avLst/>
+          </a:prstGeom>
+          <a:ln>
+            <a:noFill/>
+          </a:ln>
+          <a:effectLst>
+            <a:softEdge rad="112500"/>
+          </a:effectLst>
+        </p:spPr>
+      </p:pic>
     </p:spTree>
     <p:extLst>
       <p:ext uri="{BB962C8B-B14F-4D97-AF65-F5344CB8AC3E}">
@@ -4798,29 +5422,51 @@
           <a:bodyPr/>
           <a:lstStyle/>
           <a:p>
-            <a:endParaRPr lang="bg-BG"/>
-          </a:p>
-        </p:txBody>
-      </p:sp>
-      <p:sp>
-        <p:nvSpPr>
-          <p:cNvPr id="3" name="Content Placeholder 2"/>
-          <p:cNvSpPr>
-            <a:spLocks noGrp="1"/>
-          </p:cNvSpPr>
+            <a:pPr algn="ctr"/>
+            <a:r>
+              <a:rPr lang="bg-BG" dirty="0" smtClean="0">
+                <a:latin typeface="Bookman Old Style" panose="02050604050505020204" pitchFamily="18" charset="0"/>
+              </a:rPr>
+              <a:t>Използвани технологии</a:t>
+            </a:r>
+            <a:endParaRPr lang="bg-BG" dirty="0">
+              <a:latin typeface="Bookman Old Style" panose="02050604050505020204" pitchFamily="18" charset="0"/>
+            </a:endParaRPr>
+          </a:p>
+        </p:txBody>
+      </p:sp>
+      <p:pic>
+        <p:nvPicPr>
+          <p:cNvPr id="4" name="Content Placeholder 3"/>
+          <p:cNvPicPr>
+            <a:picLocks noGrp="1" noChangeAspect="1"/>
+          </p:cNvPicPr>
           <p:nvPr>
             <p:ph idx="1"/>
           </p:nvPr>
-        </p:nvSpPr>
-        <p:spPr/>
-        <p:txBody>
-          <a:bodyPr/>
-          <a:lstStyle/>
-          <a:p>
-            <a:endParaRPr lang="bg-BG"/>
-          </a:p>
-        </p:txBody>
-      </p:sp>
+        </p:nvPicPr>
+        <p:blipFill>
+          <a:blip r:embed="rId3"/>
+          <a:stretch>
+            <a:fillRect/>
+          </a:stretch>
+        </p:blipFill>
+        <p:spPr>
+          <a:xfrm>
+            <a:off x="2940050" y="2011363"/>
+            <a:ext cx="6310312" cy="4206875"/>
+          </a:xfrm>
+          <a:prstGeom prst="rect">
+            <a:avLst/>
+          </a:prstGeom>
+          <a:ln>
+            <a:noFill/>
+          </a:ln>
+          <a:effectLst>
+            <a:softEdge rad="112500"/>
+          </a:effectLst>
+        </p:spPr>
+      </p:pic>
     </p:spTree>
     <p:extLst>
       <p:ext uri="{BB962C8B-B14F-4D97-AF65-F5344CB8AC3E}">
@@ -4861,34 +5507,63 @@
             <p:ph type="title"/>
           </p:nvPr>
         </p:nvSpPr>
-        <p:spPr/>
-        <p:txBody>
-          <a:bodyPr/>
-          <a:lstStyle/>
-          <a:p>
-            <a:endParaRPr lang="bg-BG"/>
-          </a:p>
-        </p:txBody>
-      </p:sp>
-      <p:sp>
-        <p:nvSpPr>
-          <p:cNvPr id="3" name="Content Placeholder 2"/>
-          <p:cNvSpPr>
-            <a:spLocks noGrp="1"/>
-          </p:cNvSpPr>
+        <p:spPr>
+          <a:xfrm>
+            <a:off x="1856936" y="-1042588"/>
+            <a:ext cx="5008098" cy="4601183"/>
+          </a:xfrm>
+        </p:spPr>
+        <p:txBody>
+          <a:bodyPr>
+            <a:normAutofit/>
+          </a:bodyPr>
+          <a:lstStyle/>
+          <a:p>
+            <a:pPr algn="ctr"/>
+            <a:r>
+              <a:rPr lang="bg-BG" sz="2800" dirty="0" smtClean="0">
+                <a:latin typeface="Bookman Old Style" panose="02050604050505020204" pitchFamily="18" charset="0"/>
+              </a:rPr>
+              <a:t>Функционалности</a:t>
+            </a:r>
+            <a:endParaRPr lang="bg-BG" sz="2800" dirty="0">
+              <a:latin typeface="Bookman Old Style" panose="02050604050505020204" pitchFamily="18" charset="0"/>
+            </a:endParaRPr>
+          </a:p>
+        </p:txBody>
+      </p:sp>
+      <p:pic>
+        <p:nvPicPr>
+          <p:cNvPr id="4" name="Content Placeholder 3"/>
+          <p:cNvPicPr>
+            <a:picLocks noGrp="1" noChangeAspect="1"/>
+          </p:cNvPicPr>
           <p:nvPr>
             <p:ph idx="1"/>
           </p:nvPr>
-        </p:nvSpPr>
-        <p:spPr/>
-        <p:txBody>
-          <a:bodyPr/>
-          <a:lstStyle/>
-          <a:p>
-            <a:endParaRPr lang="bg-BG"/>
-          </a:p>
-        </p:txBody>
-      </p:sp>
+        </p:nvPicPr>
+        <p:blipFill>
+          <a:blip r:embed="rId3"/>
+          <a:stretch>
+            <a:fillRect/>
+          </a:stretch>
+        </p:blipFill>
+        <p:spPr>
+          <a:xfrm>
+            <a:off x="4445293" y="2102485"/>
+            <a:ext cx="6310312" cy="4206875"/>
+          </a:xfrm>
+          <a:prstGeom prst="rect">
+            <a:avLst/>
+          </a:prstGeom>
+          <a:ln>
+            <a:noFill/>
+          </a:ln>
+          <a:effectLst>
+            <a:softEdge rad="112500"/>
+          </a:effectLst>
+        </p:spPr>
+      </p:pic>
     </p:spTree>
     <p:extLst>
       <p:ext uri="{BB962C8B-B14F-4D97-AF65-F5344CB8AC3E}">
@@ -4934,29 +5609,50 @@
           <a:bodyPr/>
           <a:lstStyle/>
           <a:p>
-            <a:endParaRPr lang="bg-BG"/>
-          </a:p>
-        </p:txBody>
-      </p:sp>
-      <p:sp>
-        <p:nvSpPr>
-          <p:cNvPr id="3" name="Content Placeholder 2"/>
-          <p:cNvSpPr>
-            <a:spLocks noGrp="1"/>
-          </p:cNvSpPr>
+            <a:r>
+              <a:rPr lang="bg-BG" dirty="0" smtClean="0">
+                <a:latin typeface="Bookman Old Style" panose="02050604050505020204" pitchFamily="18" charset="0"/>
+              </a:rPr>
+              <a:t>Заключение</a:t>
+            </a:r>
+            <a:endParaRPr lang="bg-BG" dirty="0">
+              <a:latin typeface="Bookman Old Style" panose="02050604050505020204" pitchFamily="18" charset="0"/>
+            </a:endParaRPr>
+          </a:p>
+        </p:txBody>
+      </p:sp>
+      <p:pic>
+        <p:nvPicPr>
+          <p:cNvPr id="4" name="Content Placeholder 3"/>
+          <p:cNvPicPr>
+            <a:picLocks noGrp="1" noChangeAspect="1"/>
+          </p:cNvPicPr>
           <p:nvPr>
             <p:ph idx="1"/>
           </p:nvPr>
-        </p:nvSpPr>
-        <p:spPr/>
-        <p:txBody>
-          <a:bodyPr/>
-          <a:lstStyle/>
-          <a:p>
-            <a:endParaRPr lang="bg-BG"/>
-          </a:p>
-        </p:txBody>
-      </p:sp>
+        </p:nvPicPr>
+        <p:blipFill>
+          <a:blip r:embed="rId3"/>
+          <a:stretch>
+            <a:fillRect/>
+          </a:stretch>
+        </p:blipFill>
+        <p:spPr>
+          <a:xfrm>
+            <a:off x="4178105" y="1947681"/>
+            <a:ext cx="6922660" cy="4557700"/>
+          </a:xfrm>
+          <a:prstGeom prst="rect">
+            <a:avLst/>
+          </a:prstGeom>
+          <a:ln>
+            <a:noFill/>
+          </a:ln>
+          <a:effectLst>
+            <a:softEdge rad="112500"/>
+          </a:effectLst>
+        </p:spPr>
+      </p:pic>
     </p:spTree>
     <p:extLst>
       <p:ext uri="{BB962C8B-B14F-4D97-AF65-F5344CB8AC3E}">
@@ -4971,93 +5667,58 @@
 </file>
 
 <file path=ppt/theme/theme1.xml><?xml version="1.0" encoding="utf-8"?>
-<a:theme xmlns:a="http://schemas.openxmlformats.org/drawingml/2006/main" name="Office Theme">
+<a:theme xmlns:a="http://schemas.openxmlformats.org/drawingml/2006/main" name="Banded">
   <a:themeElements>
-    <a:clrScheme name="Office">
+    <a:clrScheme name="Banded">
       <a:dk1>
-        <a:sysClr val="windowText" lastClr="000000"/>
+        <a:srgbClr val="2C2C2C"/>
       </a:dk1>
       <a:lt1>
-        <a:sysClr val="window" lastClr="FFFFFF"/>
+        <a:srgbClr val="FFFFFF"/>
       </a:lt1>
       <a:dk2>
-        <a:srgbClr val="44546A"/>
+        <a:srgbClr val="099BDD"/>
       </a:dk2>
       <a:lt2>
-        <a:srgbClr val="E7E6E6"/>
+        <a:srgbClr val="F2F2F2"/>
       </a:lt2>
       <a:accent1>
-        <a:srgbClr val="5B9BD5"/>
+        <a:srgbClr val="FFC000"/>
       </a:accent1>
       <a:accent2>
-        <a:srgbClr val="ED7D31"/>
+        <a:srgbClr val="A5D028"/>
       </a:accent2>
       <a:accent3>
-        <a:srgbClr val="A5A5A5"/>
+        <a:srgbClr val="08CC78"/>
       </a:accent3>
       <a:accent4>
-        <a:srgbClr val="FFC000"/>
+        <a:srgbClr val="F24099"/>
       </a:accent4>
       <a:accent5>
-        <a:srgbClr val="4472C4"/>
+        <a:srgbClr val="828288"/>
       </a:accent5>
       <a:accent6>
-        <a:srgbClr val="70AD47"/>
+        <a:srgbClr val="F56617"/>
       </a:accent6>
       <a:hlink>
-        <a:srgbClr val="0563C1"/>
+        <a:srgbClr val="005DBA"/>
       </a:hlink>
       <a:folHlink>
-        <a:srgbClr val="954F72"/>
+        <a:srgbClr val="6C606A"/>
       </a:folHlink>
     </a:clrScheme>
-    <a:fontScheme name="Office">
+    <a:fontScheme name="Banded">
       <a:majorFont>
-        <a:latin typeface="Calibri Light" panose="020F0302020204030204"/>
+        <a:latin typeface="Corbel" panose="020B0503020204020204"/>
         <a:ea typeface=""/>
         <a:cs typeface=""/>
-        <a:font script="Jpan" typeface="游ゴシック Light"/>
+        <a:font script="Jpan" typeface="ＭＳ ゴシック"/>
         <a:font script="Hang" typeface="맑은 고딕"/>
-        <a:font script="Hans" typeface="等线 Light"/>
+        <a:font script="Hans" typeface="宋体"/>
         <a:font script="Hant" typeface="新細明體"/>
-        <a:font script="Arab" typeface="Times New Roman"/>
-        <a:font script="Hebr" typeface="Times New Roman"/>
-        <a:font script="Thai" typeface="Angsana New"/>
-        <a:font script="Ethi" typeface="Nyala"/>
-        <a:font script="Beng" typeface="Vrinda"/>
-        <a:font script="Gujr" typeface="Shruti"/>
-        <a:font script="Khmr" typeface="MoolBoran"/>
-        <a:font script="Knda" typeface="Tunga"/>
-        <a:font script="Guru" typeface="Raavi"/>
-        <a:font script="Cans" typeface="Euphemia"/>
-        <a:font script="Cher" typeface="Plantagenet Cherokee"/>
-        <a:font script="Yiii" typeface="Microsoft Yi Baiti"/>
-        <a:font script="Tibt" typeface="Microsoft Himalaya"/>
-        <a:font script="Thaa" typeface="MV Boli"/>
-        <a:font script="Deva" typeface="Mangal"/>
-        <a:font script="Telu" typeface="Gautami"/>
-        <a:font script="Taml" typeface="Latha"/>
-        <a:font script="Syrc" typeface="Estrangelo Edessa"/>
-        <a:font script="Orya" typeface="Kalinga"/>
-        <a:font script="Mlym" typeface="Kartika"/>
-        <a:font script="Laoo" typeface="DokChampa"/>
-        <a:font script="Sinh" typeface="Iskoola Pota"/>
-        <a:font script="Mong" typeface="Mongolian Baiti"/>
-        <a:font script="Viet" typeface="Times New Roman"/>
-        <a:font script="Uigh" typeface="Microsoft Uighur"/>
-        <a:font script="Geor" typeface="Sylfaen"/>
-      </a:majorFont>
-      <a:minorFont>
-        <a:latin typeface="Calibri" panose="020F0502020204030204"/>
-        <a:ea typeface=""/>
-        <a:cs typeface=""/>
-        <a:font script="Jpan" typeface="游ゴシック"/>
-        <a:font script="Hang" typeface="맑은 고딕"/>
-        <a:font script="Hans" typeface="等线"/>
-        <a:font script="Hant" typeface="新細明體"/>
-        <a:font script="Arab" typeface="Arial"/>
-        <a:font script="Hebr" typeface="Arial"/>
-        <a:font script="Thai" typeface="Cordia New"/>
+        <a:font script="Arab" typeface="Tahoma"/>
+        <a:font script="Hebr" typeface="Gisha"/>
+        <a:font script="Thai" typeface="DilleniaUPC"/>
         <a:font script="Ethi" typeface="Nyala"/>
         <a:font script="Beng" typeface="Vrinda"/>
         <a:font script="Gujr" typeface="Shruti"/>
@@ -5078,12 +5739,47 @@
         <a:font script="Laoo" typeface="DokChampa"/>
         <a:font script="Sinh" typeface="Iskoola Pota"/>
         <a:font script="Mong" typeface="Mongolian Baiti"/>
-        <a:font script="Viet" typeface="Arial"/>
+        <a:font script="Viet" typeface="Tahoma"/>
+        <a:font script="Uigh" typeface="Microsoft Uighur"/>
+        <a:font script="Geor" typeface="Sylfaen"/>
+      </a:majorFont>
+      <a:minorFont>
+        <a:latin typeface="Corbel" panose="020B0503020204020204"/>
+        <a:ea typeface=""/>
+        <a:cs typeface=""/>
+        <a:font script="Jpan" typeface="ＭＳ ゴシック"/>
+        <a:font script="Hang" typeface="맑은 고딕"/>
+        <a:font script="Hans" typeface="宋体"/>
+        <a:font script="Hant" typeface="新細明體"/>
+        <a:font script="Arab" typeface="Tahoma"/>
+        <a:font script="Hebr" typeface="Gisha"/>
+        <a:font script="Thai" typeface="DilleniaUPC"/>
+        <a:font script="Ethi" typeface="Nyala"/>
+        <a:font script="Beng" typeface="Vrinda"/>
+        <a:font script="Gujr" typeface="Shruti"/>
+        <a:font script="Khmr" typeface="DaunPenh"/>
+        <a:font script="Knda" typeface="Tunga"/>
+        <a:font script="Guru" typeface="Raavi"/>
+        <a:font script="Cans" typeface="Euphemia"/>
+        <a:font script="Cher" typeface="Plantagenet Cherokee"/>
+        <a:font script="Yiii" typeface="Microsoft Yi Baiti"/>
+        <a:font script="Tibt" typeface="Microsoft Himalaya"/>
+        <a:font script="Thaa" typeface="MV Boli"/>
+        <a:font script="Deva" typeface="Mangal"/>
+        <a:font script="Telu" typeface="Gautami"/>
+        <a:font script="Taml" typeface="Latha"/>
+        <a:font script="Syrc" typeface="Estrangelo Edessa"/>
+        <a:font script="Orya" typeface="Kalinga"/>
+        <a:font script="Mlym" typeface="Kartika"/>
+        <a:font script="Laoo" typeface="DokChampa"/>
+        <a:font script="Sinh" typeface="Iskoola Pota"/>
+        <a:font script="Mong" typeface="Mongolian Baiti"/>
+        <a:font script="Viet" typeface="Verdana"/>
         <a:font script="Uigh" typeface="Microsoft Uighur"/>
         <a:font script="Geor" typeface="Sylfaen"/>
       </a:minorFont>
     </a:fontScheme>
-    <a:fmtScheme name="Office">
+    <a:fmtScheme name="Banded">
       <a:fillStyleLst>
         <a:solidFill>
           <a:schemeClr val="phClr"/>
@@ -5092,23 +5788,23 @@
           <a:gsLst>
             <a:gs pos="0">
               <a:schemeClr val="phClr">
-                <a:lumMod val="110000"/>
-                <a:satMod val="105000"/>
-                <a:tint val="67000"/>
+                <a:tint val="65000"/>
+                <a:satMod val="120000"/>
+                <a:lumMod val="107000"/>
               </a:schemeClr>
             </a:gs>
             <a:gs pos="50000">
               <a:schemeClr val="phClr">
-                <a:lumMod val="105000"/>
-                <a:satMod val="103000"/>
-                <a:tint val="73000"/>
+                <a:tint val="70000"/>
+                <a:satMod val="124000"/>
+                <a:lumMod val="103000"/>
               </a:schemeClr>
             </a:gs>
             <a:gs pos="100000">
               <a:schemeClr val="phClr">
-                <a:lumMod val="105000"/>
-                <a:satMod val="109000"/>
-                <a:tint val="81000"/>
+                <a:tint val="85000"/>
+                <a:satMod val="120000"/>
+                <a:lumMod val="100000"/>
               </a:schemeClr>
             </a:gs>
           </a:gsLst>
@@ -5118,23 +5814,24 @@
           <a:gsLst>
             <a:gs pos="0">
               <a:schemeClr val="phClr">
-                <a:satMod val="103000"/>
-                <a:lumMod val="102000"/>
-                <a:tint val="94000"/>
+                <a:tint val="85000"/>
+                <a:shade val="98000"/>
+                <a:satMod val="110000"/>
+                <a:lumMod val="103000"/>
               </a:schemeClr>
             </a:gs>
             <a:gs pos="50000">
               <a:schemeClr val="phClr">
-                <a:satMod val="110000"/>
+                <a:shade val="85000"/>
+                <a:satMod val="105000"/>
                 <a:lumMod val="100000"/>
-                <a:shade val="100000"/>
               </a:schemeClr>
             </a:gs>
             <a:gs pos="100000">
               <a:schemeClr val="phClr">
-                <a:lumMod val="99000"/>
+                <a:shade val="60000"/>
                 <a:satMod val="120000"/>
-                <a:shade val="78000"/>
+                <a:lumMod val="100000"/>
               </a:schemeClr>
             </a:gs>
           </a:gsLst>
@@ -5142,26 +5839,23 @@
         </a:gradFill>
       </a:fillStyleLst>
       <a:lnStyleLst>
-        <a:ln w="6350" cap="flat" cmpd="sng" algn="ctr">
+        <a:ln w="9525" cap="flat" cmpd="sng" algn="ctr">
           <a:solidFill>
             <a:schemeClr val="phClr"/>
           </a:solidFill>
           <a:prstDash val="solid"/>
-          <a:miter lim="800000"/>
         </a:ln>
         <a:ln w="12700" cap="flat" cmpd="sng" algn="ctr">
           <a:solidFill>
             <a:schemeClr val="phClr"/>
           </a:solidFill>
           <a:prstDash val="solid"/>
-          <a:miter lim="800000"/>
         </a:ln>
-        <a:ln w="19050" cap="flat" cmpd="sng" algn="ctr">
+        <a:ln w="25400" cap="flat" cmpd="sng" algn="ctr">
           <a:solidFill>
             <a:schemeClr val="phClr"/>
           </a:solidFill>
           <a:prstDash val="solid"/>
-          <a:miter lim="800000"/>
         </a:ln>
       </a:lnStyleLst>
       <a:effectStyleLst>
@@ -5169,11 +5863,17 @@
           <a:effectLst/>
         </a:effectStyle>
         <a:effectStyle>
-          <a:effectLst/>
+          <a:effectLst>
+            <a:outerShdw blurRad="50800" dist="15875" dir="5400000" algn="ctr" rotWithShape="0">
+              <a:srgbClr val="000000">
+                <a:alpha val="68000"/>
+              </a:srgbClr>
+            </a:outerShdw>
+          </a:effectLst>
         </a:effectStyle>
         <a:effectStyle>
           <a:effectLst>
-            <a:outerShdw blurRad="57150" dist="19050" dir="5400000" algn="ctr" rotWithShape="0">
+            <a:outerShdw blurRad="88900" dist="27940" dir="5400000" algn="ctr" rotWithShape="0">
               <a:srgbClr val="000000">
                 <a:alpha val="63000"/>
               </a:srgbClr>
@@ -5185,34 +5885,31 @@
         <a:solidFill>
           <a:schemeClr val="phClr"/>
         </a:solidFill>
-        <a:solidFill>
-          <a:schemeClr val="phClr">
-            <a:tint val="95000"/>
-            <a:satMod val="170000"/>
-          </a:schemeClr>
-        </a:solidFill>
+        <a:blipFill rotWithShape="1">
+          <a:blip xmlns:r="http://schemas.openxmlformats.org/officeDocument/2006/relationships" r:embed="rId1">
+            <a:duotone>
+              <a:schemeClr val="phClr"/>
+              <a:schemeClr val="phClr">
+                <a:shade val="91000"/>
+                <a:satMod val="105000"/>
+              </a:schemeClr>
+            </a:duotone>
+          </a:blip>
+          <a:tile tx="0" ty="0" sx="100000" sy="100000" flip="none" algn="tl"/>
+        </a:blipFill>
         <a:gradFill rotWithShape="1">
           <a:gsLst>
             <a:gs pos="0">
               <a:schemeClr val="phClr">
-                <a:tint val="93000"/>
-                <a:satMod val="150000"/>
-                <a:shade val="98000"/>
-                <a:lumMod val="102000"/>
-              </a:schemeClr>
-            </a:gs>
-            <a:gs pos="50000">
-              <a:schemeClr val="phClr">
-                <a:tint val="98000"/>
-                <a:satMod val="130000"/>
-                <a:shade val="90000"/>
-                <a:lumMod val="103000"/>
+                <a:tint val="100000"/>
+                <a:shade val="0"/>
+                <a:satMod val="100000"/>
               </a:schemeClr>
             </a:gs>
             <a:gs pos="100000">
               <a:schemeClr val="phClr">
-                <a:shade val="63000"/>
-                <a:satMod val="120000"/>
+                <a:shade val="100000"/>
+                <a:satMod val="100000"/>
               </a:schemeClr>
             </a:gs>
           </a:gsLst>
@@ -5225,7 +5922,7 @@
   <a:extraClrSchemeLst/>
   <a:extLst>
     <a:ext uri="{05A4C25C-085E-4340-85A3-A5531E510DB2}">
-      <thm15:themeFamily xmlns:thm15="http://schemas.microsoft.com/office/thememl/2012/main" name="Office Theme" id="{62F939B6-93AF-4DB8-9C6B-D6C7DFDC589F}" vid="{4A3C46E8-61CC-4603-A589-7422A47A8E4A}"/>
+      <thm15:themeFamily xmlns:thm15="http://schemas.microsoft.com/office/thememl/2012/main" name="Banded" id="{98DFF888-2449-4D28-977C-6306C017633E}" vid="{9792607F-9579-4224-82FF-9C88C3E1E53D}"/>
     </a:ext>
   </a:extLst>
 </a:theme>

--- a/DR/защита.pptx
+++ b/DR/защита.pptx
@@ -524,23 +524,14 @@
             </a:r>
             <a:r>
               <a:rPr lang="ru-RU" dirty="0" smtClean="0"/>
-              <a:t>Уважаема </a:t>
-            </a:r>
+              <a:t>Уважаема г-жо Директор,</a:t>
+            </a:r>
+          </a:p>
+          <a:p>
             <a:r>
               <a:rPr lang="ru-RU" dirty="0" smtClean="0"/>
-              <a:t>г-жо Директор,</a:t>
-            </a:r>
-          </a:p>
-          <a:p>
-            <a:r>
-              <a:rPr lang="ru-RU" dirty="0" smtClean="0"/>
-              <a:t>Уважаема комисия</a:t>
-            </a:r>
-            <a:r>
-              <a:rPr lang="ru-RU" dirty="0" smtClean="0"/>
-              <a:t>,</a:t>
-            </a:r>
-            <a:endParaRPr lang="ru-RU" dirty="0" smtClean="0"/>
+              <a:t>Уважаема комисия,</a:t>
+            </a:r>
           </a:p>
           <a:p>
             <a:r>
@@ -4655,8 +4646,8 @@
         </p:nvSpPr>
         <p:spPr>
           <a:xfrm>
-            <a:off x="3137095" y="1488558"/>
-            <a:ext cx="7090117" cy="537190"/>
+            <a:off x="3094891" y="1468082"/>
+            <a:ext cx="8439913" cy="537190"/>
           </a:xfrm>
         </p:spPr>
         <p:txBody>
@@ -4685,7 +4676,29 @@
                 <a:ea typeface="Calibri" panose="020F0502020204030204" pitchFamily="34" charset="0"/>
                 <a:cs typeface="Calibri" panose="020F0502020204030204" pitchFamily="34" charset="0"/>
               </a:rPr>
-              <a:t>:Wake on Lan</a:t>
+              <a:t>:Wake on </a:t>
+            </a:r>
+            <a:r>
+              <a:rPr lang="en-US" sz="4000" dirty="0" smtClean="0">
+                <a:solidFill>
+                  <a:schemeClr val="tx2"/>
+                </a:solidFill>
+                <a:latin typeface="Bookman Old Style" panose="02050604050505020204" pitchFamily="18" charset="0"/>
+                <a:ea typeface="Calibri" panose="020F0502020204030204" pitchFamily="34" charset="0"/>
+                <a:cs typeface="Calibri" panose="020F0502020204030204" pitchFamily="34" charset="0"/>
+              </a:rPr>
+              <a:t>Lan</a:t>
+            </a:r>
+            <a:r>
+              <a:rPr lang="bg-BG" sz="4000" dirty="0" smtClean="0">
+                <a:solidFill>
+                  <a:schemeClr val="tx2"/>
+                </a:solidFill>
+                <a:latin typeface="Bookman Old Style" panose="02050604050505020204" pitchFamily="18" charset="0"/>
+                <a:ea typeface="Calibri" panose="020F0502020204030204" pitchFamily="34" charset="0"/>
+                <a:cs typeface="Calibri" panose="020F0502020204030204" pitchFamily="34" charset="0"/>
+              </a:rPr>
+              <a:t> сървър</a:t>
             </a:r>
             <a:endParaRPr lang="bg-BG" sz="4000" dirty="0">
               <a:solidFill>
@@ -4903,10 +4916,16 @@
           <a:lstStyle/>
           <a:p>
             <a:r>
+              <a:rPr lang="bg-BG" sz="3600" smtClean="0">
+                <a:latin typeface="Bookman Old Style" panose="02050604050505020204" pitchFamily="18" charset="0"/>
+              </a:rPr>
+              <a:t>Благодаря Ви </a:t>
+            </a:r>
+            <a:r>
               <a:rPr lang="bg-BG" sz="3600" dirty="0" smtClean="0">
                 <a:latin typeface="Bookman Old Style" panose="02050604050505020204" pitchFamily="18" charset="0"/>
               </a:rPr>
-              <a:t>Благодаря за вниманието</a:t>
+              <a:t>за вниманието</a:t>
             </a:r>
             <a:endParaRPr lang="bg-BG" sz="3600" dirty="0">
               <a:latin typeface="Bookman Old Style" panose="02050604050505020204" pitchFamily="18" charset="0"/>
